--- a/hoverfly/hoverfly.pptx
+++ b/hoverfly/hoverfly.pptx
@@ -22,8 +22,6 @@
     <p:sldId id="260" r:id="rId17"/>
     <p:sldId id="261" r:id="rId18"/>
     <p:sldId id="262" r:id="rId19"/>
-    <p:sldId id="263" r:id="rId20"/>
-    <p:sldId id="264" r:id="rId21"/>
   </p:sldIdLst>
   <p:sldSz cx="12192000" cy="6858000"/>
   <p:notesSz cx="7559675" cy="10691813"/>
@@ -161,7 +159,7 @@
         <p:txBody>
           <a:bodyPr/>
           <a:p>
-            <a:fld id="{28E31F84-1843-46DD-B6B3-B54F64F7EFE7}" type="slidenum">
+            <a:fld id="{A265BAFE-7062-4364-8472-8612797BC0E1}" type="slidenum">
               <a:t>&lt;#&gt;</a:t>
             </a:fld>
           </a:p>
@@ -244,7 +242,7 @@
         <p:txBody>
           <a:bodyPr/>
           <a:p>
-            <a:fld id="{7530F6E2-F23A-4976-97EA-43B328BC1ADF}" type="slidenum">
+            <a:fld id="{4A744ED3-9E93-4578-9AC8-EF2C12D8D0AC}" type="slidenum">
               <a:t>&lt;#&gt;</a:t>
             </a:fld>
           </a:p>
@@ -327,7 +325,7 @@
         <p:txBody>
           <a:bodyPr/>
           <a:p>
-            <a:fld id="{60C929AB-AFAC-422A-8D44-06998261B9D5}" type="slidenum">
+            <a:fld id="{06CB5B3D-D195-4083-864A-52D7B81371AE}" type="slidenum">
               <a:t>&lt;#&gt;</a:t>
             </a:fld>
           </a:p>
@@ -410,7 +408,7 @@
         <p:txBody>
           <a:bodyPr/>
           <a:p>
-            <a:fld id="{538A7D1C-C4CE-4D84-9C77-1C994238158B}" type="slidenum">
+            <a:fld id="{1946DF53-8037-49B2-9B65-563975A1A62B}" type="slidenum">
               <a:t>&lt;#&gt;</a:t>
             </a:fld>
           </a:p>
@@ -493,7 +491,7 @@
         <p:txBody>
           <a:bodyPr/>
           <a:p>
-            <a:fld id="{31BA198A-9DB9-45D0-AC75-D6D170E2180F}" type="slidenum">
+            <a:fld id="{3945F99E-CF0A-4D01-ADF5-273F4A8F38AC}" type="slidenum">
               <a:t>&lt;#&gt;</a:t>
             </a:fld>
           </a:p>
@@ -659,7 +657,7 @@
         <p:txBody>
           <a:bodyPr/>
           <a:p>
-            <a:fld id="{B83577D4-F778-47CA-A37E-92F1077185F2}" type="slidenum">
+            <a:fld id="{96644EA6-F1BA-4182-802B-8F143BE7D506}" type="slidenum">
               <a:t>&lt;#&gt;</a:t>
             </a:fld>
           </a:p>
@@ -742,7 +740,7 @@
         <p:txBody>
           <a:bodyPr/>
           <a:p>
-            <a:fld id="{1B2A2A7C-3BA0-431F-A054-DDB6030841F9}" type="slidenum">
+            <a:fld id="{4396FCF3-87F4-4BE2-8B38-967BC4A85539}" type="slidenum">
               <a:t>&lt;#&gt;</a:t>
             </a:fld>
           </a:p>
@@ -951,7 +949,7 @@
         <p:txBody>
           <a:bodyPr/>
           <a:p>
-            <a:fld id="{D699AF3A-E34F-4DC9-A87F-75C56C43831B}" type="slidenum">
+            <a:fld id="{794151B8-01F2-4603-A5BA-6624640230EE}" type="slidenum">
               <a:t>&lt;#&gt;</a:t>
             </a:fld>
           </a:p>
@@ -1034,7 +1032,7 @@
         <p:txBody>
           <a:bodyPr/>
           <a:p>
-            <a:fld id="{5A1349A9-E819-4FD2-92D3-C41D8CBBC992}" type="slidenum">
+            <a:fld id="{9FA69FA2-FC9F-4809-A901-F00386358536}" type="slidenum">
               <a:t>&lt;#&gt;</a:t>
             </a:fld>
           </a:p>
@@ -1157,7 +1155,7 @@
         <p:txBody>
           <a:bodyPr/>
           <a:p>
-            <a:fld id="{8CE2E7E2-70BC-48DD-848F-B180A2332814}" type="slidenum">
+            <a:fld id="{D7CD9358-9163-4EC1-BCF1-35FA74CB1D40}" type="slidenum">
               <a:t>&lt;#&gt;</a:t>
             </a:fld>
           </a:p>
@@ -1240,7 +1238,7 @@
         <p:txBody>
           <a:bodyPr/>
           <a:p>
-            <a:fld id="{50D2E64A-2BC0-46C2-9852-908CC4073E98}" type="slidenum">
+            <a:fld id="{71887D52-B4EF-4D89-9B7F-30D4963BCD5E}" type="slidenum">
               <a:t>&lt;#&gt;</a:t>
             </a:fld>
           </a:p>
@@ -1473,7 +1471,7 @@
                 <a:tab algn="l" pos="0"/>
               </a:tabLst>
             </a:pPr>
-            <a:fld id="{9C74AAA2-2AF4-47FA-B5D2-09A2CEECD762}" type="slidenum">
+            <a:fld id="{4181A625-B3C5-42C8-B6FB-0FED48A6B7E8}" type="slidenum">
               <a:rPr b="0" lang="en-US" sz="1200" spc="-1" strike="noStrike">
                 <a:solidFill>
                   <a:schemeClr val="dk1">
@@ -1714,7 +1712,7 @@
                 <a:tab algn="l" pos="0"/>
               </a:tabLst>
             </a:pPr>
-            <a:fld id="{2CC563A0-97B5-487D-9887-DBC69AA59C67}" type="slidenum">
+            <a:fld id="{BBE622D0-1D10-47EA-AEFF-96BC2CCC6945}" type="slidenum">
               <a:rPr b="0" lang="en-US" sz="1200" spc="-1" strike="noStrike">
                 <a:solidFill>
                   <a:schemeClr val="dk1">
@@ -1955,7 +1953,7 @@
                 <a:tab algn="l" pos="0"/>
               </a:tabLst>
             </a:pPr>
-            <a:fld id="{512E235D-D129-4BE3-8DAE-DA4171A83230}" type="slidenum">
+            <a:fld id="{275129AF-4085-4B90-B535-B1995C130313}" type="slidenum">
               <a:rPr b="0" lang="en-US" sz="1200" spc="-1" strike="noStrike">
                 <a:solidFill>
                   <a:schemeClr val="dk1">
@@ -2196,7 +2194,7 @@
                 <a:tab algn="l" pos="0"/>
               </a:tabLst>
             </a:pPr>
-            <a:fld id="{FB314129-FF0A-4258-9AB0-93BC3B3C5E4D}" type="slidenum">
+            <a:fld id="{AA0E0D62-C54E-4AD3-B42A-0AD180833F3D}" type="slidenum">
               <a:rPr b="0" lang="en-US" sz="1200" spc="-1" strike="noStrike">
                 <a:solidFill>
                   <a:schemeClr val="dk1">
@@ -2437,7 +2435,7 @@
                 <a:tab algn="l" pos="0"/>
               </a:tabLst>
             </a:pPr>
-            <a:fld id="{DF8F2469-CFFD-4938-A95B-01C75B5E0A67}" type="slidenum">
+            <a:fld id="{ED3724EF-4078-4A34-A3D8-FE82DD129829}" type="slidenum">
               <a:rPr b="0" lang="en-US" sz="1200" spc="-1" strike="noStrike">
                 <a:solidFill>
                   <a:schemeClr val="dk1">
@@ -2588,7 +2586,16 @@
                 </a:solidFill>
                 <a:latin typeface="Arial"/>
               </a:rPr>
-              <a:t>Click to edit the title text format</a:t>
+              <a:t>Click to edit the title text </a:t>
+            </a:r>
+            <a:r>
+              <a:rPr b="0" lang="pt-BR" sz="1800" spc="-1" strike="noStrike">
+                <a:solidFill>
+                  <a:srgbClr val="000000"/>
+                </a:solidFill>
+                <a:latin typeface="Arial"/>
+              </a:rPr>
+              <a:t>format</a:t>
             </a:r>
             <a:endParaRPr b="0" lang="pt-BR" sz="1800" spc="-1" strike="noStrike">
               <a:solidFill>
@@ -2952,7 +2959,7 @@
                 <a:tab algn="l" pos="0"/>
               </a:tabLst>
             </a:pPr>
-            <a:fld id="{BF0D3A29-2AC4-45DE-9004-D3AC8242F172}" type="slidenum">
+            <a:fld id="{9F0D791E-652C-4C05-9E8E-22ACAFF9810F}" type="slidenum">
               <a:rPr b="0" lang="en-US" sz="1200" spc="-1" strike="noStrike">
                 <a:solidFill>
                   <a:schemeClr val="dk1">
@@ -3193,7 +3200,7 @@
                 <a:tab algn="l" pos="0"/>
               </a:tabLst>
             </a:pPr>
-            <a:fld id="{9896E6E9-1FA4-4E69-B4B7-E839408C783C}" type="slidenum">
+            <a:fld id="{B9FC40B7-0935-4D10-9DF4-9FA2358BB1B8}" type="slidenum">
               <a:rPr b="0" lang="en-US" sz="1200" spc="-1" strike="noStrike">
                 <a:solidFill>
                   <a:schemeClr val="dk1">
@@ -3933,7 +3940,7 @@
                 <a:tab algn="l" pos="0"/>
               </a:tabLst>
             </a:pPr>
-            <a:fld id="{CD6CD85B-A9D7-44FD-AA9C-D03294B49C02}" type="slidenum">
+            <a:fld id="{0F38C47A-8304-41EA-A912-E95CEC77E590}" type="slidenum">
               <a:rPr b="0" lang="en-US" sz="1200" spc="-1" strike="noStrike">
                 <a:solidFill>
                   <a:schemeClr val="dk1">
@@ -4174,7 +4181,7 @@
                 <a:tab algn="l" pos="0"/>
               </a:tabLst>
             </a:pPr>
-            <a:fld id="{909D7070-F5F2-458E-A3B5-A81CD3CC72BA}" type="slidenum">
+            <a:fld id="{06787828-BED0-4DBF-8BDD-633A5E36EFBC}" type="slidenum">
               <a:rPr b="0" lang="en-US" sz="1200" spc="-1" strike="noStrike">
                 <a:solidFill>
                   <a:schemeClr val="dk1">
@@ -4325,7 +4332,16 @@
                 </a:solidFill>
                 <a:latin typeface="Arial"/>
               </a:rPr>
-              <a:t>Click to edit the title text format</a:t>
+              <a:t>Click to edit the title text </a:t>
+            </a:r>
+            <a:r>
+              <a:rPr b="0" lang="pt-BR" sz="1800" spc="-1" strike="noStrike">
+                <a:solidFill>
+                  <a:srgbClr val="000000"/>
+                </a:solidFill>
+                <a:latin typeface="Arial"/>
+              </a:rPr>
+              <a:t>format</a:t>
             </a:r>
             <a:endParaRPr b="0" lang="pt-BR" sz="1800" spc="-1" strike="noStrike">
               <a:solidFill>
@@ -4464,7 +4480,7 @@
                 <a:tab algn="l" pos="0"/>
               </a:tabLst>
             </a:pPr>
-            <a:fld id="{CED2282B-785B-48FA-AB46-5348FFCF6844}" type="slidenum">
+            <a:fld id="{31F6190D-1661-4463-B2C7-7FA407CDF32C}" type="slidenum">
               <a:rPr b="0" lang="en-US" sz="1200" spc="-1" strike="noStrike">
                 <a:solidFill>
                   <a:schemeClr val="dk1">
@@ -4705,7 +4721,7 @@
                 <a:tab algn="l" pos="0"/>
               </a:tabLst>
             </a:pPr>
-            <a:fld id="{134382CE-40E3-468F-AFEA-C302853DDC74}" type="slidenum">
+            <a:fld id="{71BA6CAF-B8FB-4523-9712-188F863DC0BC}" type="slidenum">
               <a:rPr b="0" lang="en-US" sz="1200" spc="-1" strike="noStrike">
                 <a:solidFill>
                   <a:schemeClr val="dk1">
@@ -6525,7 +6541,7 @@
         <p:spPr>
           <a:xfrm>
             <a:off x="777240" y="3246120"/>
-            <a:ext cx="4022640" cy="1341360"/>
+            <a:ext cx="4022640" cy="823680"/>
           </a:xfrm>
           <a:prstGeom prst="rect">
             <a:avLst/>
@@ -6587,18 +6603,6 @@
               </a:rPr>
               <a:t>Match requests to stored responses</a:t>
             </a:r>
-            <a:br>
-              <a:rPr sz="1800"/>
-            </a:br>
-            <a:r>
-              <a:rPr b="0" lang="pt-BR" sz="1700" spc="-1" strike="noStrike">
-                <a:solidFill>
-                  <a:srgbClr val="263143"/>
-                </a:solidFill>
-                <a:latin typeface="Calibri"/>
-              </a:rPr>
-              <a:t>Export and reuse simulations across environments</a:t>
-            </a:r>
             <a:endParaRPr b="0" lang="pt-BR" sz="1700" spc="-1" strike="noStrike">
               <a:solidFill>
                 <a:srgbClr val="000000"/>
@@ -6616,7 +6620,7 @@
         </p:nvSpPr>
         <p:spPr>
           <a:xfrm>
-            <a:off x="5212080" y="1828800"/>
+            <a:off x="5119920" y="1829160"/>
             <a:ext cx="1828080" cy="1050840"/>
           </a:xfrm>
           <a:prstGeom prst="roundRect">
@@ -6680,7 +6684,7 @@
         </p:nvSpPr>
         <p:spPr>
           <a:xfrm>
-            <a:off x="5413320" y="1993320"/>
+            <a:off x="5321160" y="1993680"/>
             <a:ext cx="1425600" cy="325800"/>
           </a:xfrm>
           <a:prstGeom prst="rect">
@@ -6733,7 +6737,7 @@
         </p:nvSpPr>
         <p:spPr>
           <a:xfrm>
-            <a:off x="5413320" y="2487240"/>
+            <a:off x="5321160" y="2487600"/>
             <a:ext cx="1425600" cy="264960"/>
           </a:xfrm>
           <a:prstGeom prst="rect">
@@ -6786,7 +6790,7 @@
         </p:nvSpPr>
         <p:spPr>
           <a:xfrm>
-            <a:off x="7498080" y="1828800"/>
+            <a:off x="7405920" y="1829160"/>
             <a:ext cx="1828080" cy="1050840"/>
           </a:xfrm>
           <a:prstGeom prst="roundRect">
@@ -6850,7 +6854,7 @@
         </p:nvSpPr>
         <p:spPr>
           <a:xfrm>
-            <a:off x="7699320" y="1993320"/>
+            <a:off x="7607160" y="1993680"/>
             <a:ext cx="1425600" cy="325800"/>
           </a:xfrm>
           <a:prstGeom prst="rect">
@@ -6903,7 +6907,7 @@
         </p:nvSpPr>
         <p:spPr>
           <a:xfrm>
-            <a:off x="7699320" y="2487240"/>
+            <a:off x="7607160" y="2487600"/>
             <a:ext cx="1425600" cy="264960"/>
           </a:xfrm>
           <a:prstGeom prst="rect">
@@ -6956,7 +6960,7 @@
         </p:nvSpPr>
         <p:spPr>
           <a:xfrm>
-            <a:off x="9784080" y="1828800"/>
+            <a:off x="9691920" y="1829160"/>
             <a:ext cx="1828080" cy="1050840"/>
           </a:xfrm>
           <a:prstGeom prst="roundRect">
@@ -7020,7 +7024,7 @@
         </p:nvSpPr>
         <p:spPr>
           <a:xfrm>
-            <a:off x="9985320" y="1993320"/>
+            <a:off x="9893160" y="1993680"/>
             <a:ext cx="1425600" cy="325800"/>
           </a:xfrm>
           <a:prstGeom prst="rect">
@@ -7073,7 +7077,7 @@
         </p:nvSpPr>
         <p:spPr>
           <a:xfrm>
-            <a:off x="9985320" y="2487240"/>
+            <a:off x="9893160" y="2319480"/>
             <a:ext cx="1425600" cy="493560"/>
           </a:xfrm>
           <a:prstGeom prst="rect">
@@ -7126,7 +7130,7 @@
         </p:nvCxnSpPr>
         <p:spPr>
           <a:xfrm>
-            <a:off x="7040880" y="2349720"/>
+            <a:off x="6948720" y="2350080"/>
             <a:ext cx="457560" cy="720"/>
           </a:xfrm>
           <a:prstGeom prst="straightConnector1">
@@ -7148,7 +7152,7 @@
         </p:nvCxnSpPr>
         <p:spPr>
           <a:xfrm>
-            <a:off x="9326880" y="2349720"/>
+            <a:off x="9234720" y="2350080"/>
             <a:ext cx="457920" cy="720"/>
           </a:xfrm>
           <a:prstGeom prst="straightConnector1">
@@ -7170,7 +7174,7 @@
         </p:nvSpPr>
         <p:spPr>
           <a:xfrm>
-            <a:off x="5303520" y="3246120"/>
+            <a:off x="5394240" y="3600000"/>
             <a:ext cx="6125760" cy="325800"/>
           </a:xfrm>
           <a:prstGeom prst="rect">
@@ -7204,7 +7208,7 @@
                 </a:solidFill>
                 <a:latin typeface="Aptos"/>
               </a:rPr>
-              <a:t>The client makes ordinary HTTP calls.</a:t>
+              <a:t>The test client makes ordinary HTTP calls.</a:t>
             </a:r>
             <a:endParaRPr b="0" lang="pt-BR" sz="1900" spc="-1" strike="noStrike">
               <a:solidFill>
@@ -7217,14 +7221,14 @@
       </p:sp>
       <p:sp>
         <p:nvSpPr>
-          <p:cNvPr id="87" name="TextBox 19"/>
+          <p:cNvPr id="87" name="TextBox 20"/>
           <p:cNvSpPr/>
           <p:nvPr/>
         </p:nvSpPr>
         <p:spPr>
           <a:xfrm>
-            <a:off x="5303520" y="3794760"/>
-            <a:ext cx="5851440" cy="767520"/>
+            <a:off x="5400000" y="4635000"/>
+            <a:ext cx="6216480" cy="585000"/>
           </a:xfrm>
           <a:prstGeom prst="rect">
             <a:avLst/>
@@ -7251,15 +7255,15 @@
               </a:lnSpc>
             </a:pPr>
             <a:r>
-              <a:rPr b="0" lang="pt-BR" sz="1600" spc="-1" strike="noStrike">
-                <a:solidFill>
-                  <a:srgbClr val="5e6c81"/>
-                </a:solidFill>
-                <a:latin typeface="Calibri"/>
-              </a:rPr>
-              <a:t>In Simulate mode, Hoverfly compares the incoming request with stored request matchers and returns the response associated with the best match.</a:t>
-            </a:r>
-            <a:endParaRPr b="0" lang="pt-BR" sz="1600" spc="-1" strike="noStrike">
+              <a:rPr b="1" lang="en-US" sz="1800" spc="-1" strike="noStrike">
+                <a:solidFill>
+                  <a:srgbClr val="008996"/>
+                </a:solidFill>
+                <a:latin typeface="Aptos"/>
+              </a:rPr>
+              <a:t>Hoverfly is a controllable stand-in for an API dependency.</a:t>
+            </a:r>
+            <a:endParaRPr b="0" lang="pt-BR" sz="1800" spc="-1" strike="noStrike">
               <a:solidFill>
                 <a:srgbClr val="000000"/>
               </a:solidFill>
@@ -7270,14 +7274,14 @@
       </p:sp>
       <p:sp>
         <p:nvSpPr>
-          <p:cNvPr id="88" name="TextBox 20"/>
+          <p:cNvPr id="88" name="TextBox 21"/>
           <p:cNvSpPr/>
           <p:nvPr/>
         </p:nvSpPr>
         <p:spPr>
           <a:xfrm>
-            <a:off x="5303520" y="5074920"/>
-            <a:ext cx="5851440" cy="585000"/>
+            <a:off x="594360" y="6528960"/>
+            <a:ext cx="7314480" cy="173880"/>
           </a:xfrm>
           <a:prstGeom prst="rect">
             <a:avLst/>
@@ -7304,15 +7308,15 @@
               </a:lnSpc>
             </a:pPr>
             <a:r>
-              <a:rPr b="1" lang="en-US" sz="1800" spc="-1" strike="noStrike">
-                <a:solidFill>
-                  <a:srgbClr val="008996"/>
+              <a:rPr b="0" lang="en-US" sz="900" spc="-1" strike="noStrike">
+                <a:solidFill>
+                  <a:srgbClr val="5e6c81"/>
                 </a:solidFill>
                 <a:latin typeface="Aptos"/>
               </a:rPr>
-              <a:t>Think: a controllable stand-in for an API dependency.</a:t>
-            </a:r>
-            <a:endParaRPr b="0" lang="pt-BR" sz="1800" spc="-1" strike="noStrike">
+              <a:t>HOVERFLY  /  API SIMULATION FOR TESTING</a:t>
+            </a:r>
+            <a:endParaRPr b="0" lang="pt-BR" sz="900" spc="-1" strike="noStrike">
               <a:solidFill>
                 <a:srgbClr val="000000"/>
               </a:solidFill>
@@ -7323,14 +7327,14 @@
       </p:sp>
       <p:sp>
         <p:nvSpPr>
-          <p:cNvPr id="89" name="TextBox 21"/>
+          <p:cNvPr id="89" name="TextBox 22"/>
           <p:cNvSpPr/>
           <p:nvPr/>
         </p:nvSpPr>
         <p:spPr>
           <a:xfrm>
-            <a:off x="594360" y="6528960"/>
-            <a:ext cx="7314480" cy="173880"/>
+            <a:off x="10972800" y="6492240"/>
+            <a:ext cx="547920" cy="189000"/>
           </a:xfrm>
           <a:prstGeom prst="rect">
             <a:avLst/>
@@ -7351,21 +7355,21 @@
             <a:spAutoFit/>
           </a:bodyPr>
           <a:p>
-            <a:pPr defTabSz="457200">
-              <a:lnSpc>
-                <a:spcPct val="100000"/>
-              </a:lnSpc>
-            </a:pPr>
-            <a:r>
-              <a:rPr b="0" lang="en-US" sz="900" spc="-1" strike="noStrike">
+            <a:pPr algn="r" defTabSz="457200">
+              <a:lnSpc>
+                <a:spcPct val="100000"/>
+              </a:lnSpc>
+            </a:pPr>
+            <a:r>
+              <a:rPr b="1" lang="en-US" sz="1000" spc="-1" strike="noStrike">
                 <a:solidFill>
                   <a:srgbClr val="5e6c81"/>
                 </a:solidFill>
                 <a:latin typeface="Aptos"/>
               </a:rPr>
-              <a:t>HOVERFLY  /  API SIMULATION FOR TESTING</a:t>
-            </a:r>
-            <a:endParaRPr b="0" lang="pt-BR" sz="900" spc="-1" strike="noStrike">
+              <a:t>03</a:t>
+            </a:r>
+            <a:endParaRPr b="0" lang="pt-BR" sz="1000" spc="-1" strike="noStrike">
               <a:solidFill>
                 <a:srgbClr val="000000"/>
               </a:solidFill>
@@ -7374,59 +7378,29 @@
           </a:p>
         </p:txBody>
       </p:sp>
-      <p:sp>
-        <p:nvSpPr>
-          <p:cNvPr id="90" name="TextBox 22"/>
-          <p:cNvSpPr/>
+      <p:pic>
+        <p:nvPicPr>
+          <p:cNvPr id="90" name="" descr=""/>
+          <p:cNvPicPr/>
           <p:nvPr/>
-        </p:nvSpPr>
-        <p:spPr>
-          <a:xfrm>
-            <a:off x="10972800" y="6492240"/>
-            <a:ext cx="547920" cy="189000"/>
-          </a:xfrm>
-          <a:prstGeom prst="rect">
-            <a:avLst/>
-          </a:prstGeom>
-          <a:noFill/>
+        </p:nvPicPr>
+        <p:blipFill>
+          <a:blip r:embed="rId1"/>
+          <a:stretch/>
+        </p:blipFill>
+        <p:spPr>
+          <a:xfrm>
+            <a:off x="540000" y="4327920"/>
+            <a:ext cx="3960000" cy="1972080"/>
+          </a:xfrm>
+          <a:prstGeom prst="rect">
+            <a:avLst/>
+          </a:prstGeom>
           <a:ln w="0">
             <a:noFill/>
           </a:ln>
         </p:spPr>
-        <p:style>
-          <a:lnRef idx="0"/>
-          <a:fillRef idx="0"/>
-          <a:effectRef idx="0"/>
-          <a:fontRef idx="minor"/>
-        </p:style>
-        <p:txBody>
-          <a:bodyPr lIns="27360" rIns="27360" tIns="18360" bIns="18360" anchor="t">
-            <a:spAutoFit/>
-          </a:bodyPr>
-          <a:p>
-            <a:pPr algn="r" defTabSz="457200">
-              <a:lnSpc>
-                <a:spcPct val="100000"/>
-              </a:lnSpc>
-            </a:pPr>
-            <a:r>
-              <a:rPr b="1" lang="en-US" sz="1000" spc="-1" strike="noStrike">
-                <a:solidFill>
-                  <a:srgbClr val="5e6c81"/>
-                </a:solidFill>
-                <a:latin typeface="Aptos"/>
-              </a:rPr>
-              <a:t>03</a:t>
-            </a:r>
-            <a:endParaRPr b="0" lang="pt-BR" sz="1000" spc="-1" strike="noStrike">
-              <a:solidFill>
-                <a:srgbClr val="000000"/>
-              </a:solidFill>
-              <a:latin typeface="Arial"/>
-            </a:endParaRPr>
-          </a:p>
-        </p:txBody>
-      </p:sp>
+      </p:pic>
     </p:spTree>
   </p:cSld>
   <mc:AlternateContent>
@@ -8215,7 +8189,7 @@
         <p:spPr>
           <a:xfrm>
             <a:off x="821520" y="4821840"/>
-            <a:ext cx="3117240" cy="722160"/>
+            <a:ext cx="3117240" cy="493560"/>
           </a:xfrm>
           <a:prstGeom prst="rect">
             <a:avLst/>
@@ -8248,7 +8222,7 @@
                 </a:solidFill>
                 <a:latin typeface="Aptos"/>
               </a:rPr>
-              <a:t>Inspect traffic or compare observed behavior with a baseline.</a:t>
+              <a:t>Simulate external API only if found a matching request</a:t>
             </a:r>
             <a:endParaRPr b="0" lang="pt-BR" sz="1500" spc="-1" strike="noStrike">
               <a:solidFill>
@@ -8385,7 +8359,7 @@
         <p:spPr>
           <a:xfrm>
             <a:off x="4521240" y="4852080"/>
-            <a:ext cx="3117240" cy="493560"/>
+            <a:ext cx="3117240" cy="265680"/>
           </a:xfrm>
           <a:prstGeom prst="rect">
             <a:avLst/>
@@ -8418,7 +8392,7 @@
                 </a:solidFill>
                 <a:latin typeface="Aptos"/>
               </a:rPr>
-              <a:t>Create responses dynamically, often using middleware.</a:t>
+              <a:t>Create responses dynamically</a:t>
             </a:r>
             <a:endParaRPr b="0" lang="pt-BR" sz="1500" spc="-1" strike="noStrike">
               <a:solidFill>
@@ -8689,7 +8663,7 @@
                 </a:solidFill>
                 <a:latin typeface="Aptos"/>
               </a:rPr>
-              <a:t>Inspect traffic or compare observed behavior with a baseline.</a:t>
+              <a:t>Compare the real external API response vs the stored simulated and store the diff</a:t>
             </a:r>
             <a:endParaRPr b="0" lang="pt-BR" sz="1500" spc="-1" strike="noStrike">
               <a:solidFill>
@@ -9514,2172 +9488,6 @@
 </file>
 
 <file path=ppt/slides/slide7.xml><?xml version="1.0" encoding="utf-8"?>
-<p:sld xmlns:a="http://schemas.openxmlformats.org/drawingml/2006/main" xmlns:p="http://schemas.openxmlformats.org/presentationml/2006/main" xmlns:r="http://schemas.openxmlformats.org/officeDocument/2006/relationships" xmlns:p14="http://schemas.microsoft.com/office/powerpoint/2010/main" xmlns:p15="http://schemas.microsoft.com/office/powerpoint/2012/main" xmlns:mc="http://schemas.openxmlformats.org/markup-compatibility/2006" show="0">
-  <p:cSld>
-    <p:bg>
-      <p:bgPr>
-        <a:solidFill>
-          <a:srgbClr val="f8fafd"/>
-        </a:solidFill>
-      </p:bgPr>
-    </p:bg>
-    <p:spTree>
-      <p:nvGrpSpPr>
-        <p:cNvPr id="1" name=""/>
-        <p:cNvGrpSpPr/>
-        <p:nvPr/>
-      </p:nvGrpSpPr>
-      <p:grpSpPr>
-        <a:xfrm>
-          <a:off x="0" y="0"/>
-          <a:ext cx="0" cy="0"/>
-          <a:chOff x="0" y="0"/>
-          <a:chExt cx="0" cy="0"/>
-        </a:xfrm>
-      </p:grpSpPr>
-      <p:sp>
-        <p:nvSpPr>
-          <p:cNvPr id="129" name="TextBox 4"/>
-          <p:cNvSpPr/>
-          <p:nvPr/>
-        </p:nvSpPr>
-        <p:spPr>
-          <a:xfrm>
-            <a:off x="594360" y="292680"/>
-            <a:ext cx="8046000" cy="204120"/>
-          </a:xfrm>
-          <a:prstGeom prst="rect">
-            <a:avLst/>
-          </a:prstGeom>
-          <a:noFill/>
-          <a:ln w="0">
-            <a:noFill/>
-          </a:ln>
-        </p:spPr>
-        <p:style>
-          <a:lnRef idx="0"/>
-          <a:fillRef idx="0"/>
-          <a:effectRef idx="0"/>
-          <a:fontRef idx="minor"/>
-        </p:style>
-        <p:txBody>
-          <a:bodyPr lIns="27360" rIns="27360" tIns="18360" bIns="18360" anchor="t">
-            <a:spAutoFit/>
-          </a:bodyPr>
-          <a:p>
-            <a:pPr defTabSz="457200">
-              <a:lnSpc>
-                <a:spcPct val="100000"/>
-              </a:lnSpc>
-            </a:pPr>
-            <a:r>
-              <a:rPr b="1" lang="en-US" sz="1100" spc="-1" strike="noStrike">
-                <a:solidFill>
-                  <a:srgbClr val="008996"/>
-                </a:solidFill>
-                <a:latin typeface="Aptos"/>
-              </a:rPr>
-              <a:t>04 / TEST INTEGRATION</a:t>
-            </a:r>
-            <a:endParaRPr b="0" lang="pt-BR" sz="1100" spc="-1" strike="noStrike">
-              <a:solidFill>
-                <a:srgbClr val="000000"/>
-              </a:solidFill>
-              <a:latin typeface="Arial"/>
-            </a:endParaRPr>
-          </a:p>
-        </p:txBody>
-      </p:sp>
-      <p:sp>
-        <p:nvSpPr>
-          <p:cNvPr id="130" name="TextBox 23"/>
-          <p:cNvSpPr/>
-          <p:nvPr/>
-        </p:nvSpPr>
-        <p:spPr>
-          <a:xfrm>
-            <a:off x="594360" y="658440"/>
-            <a:ext cx="10880640" cy="493560"/>
-          </a:xfrm>
-          <a:prstGeom prst="rect">
-            <a:avLst/>
-          </a:prstGeom>
-          <a:noFill/>
-          <a:ln w="0">
-            <a:noFill/>
-          </a:ln>
-        </p:spPr>
-        <p:style>
-          <a:lnRef idx="0"/>
-          <a:fillRef idx="0"/>
-          <a:effectRef idx="0"/>
-          <a:fontRef idx="minor"/>
-        </p:style>
-        <p:txBody>
-          <a:bodyPr lIns="27360" rIns="27360" tIns="18360" bIns="18360" anchor="t">
-            <a:spAutoFit/>
-          </a:bodyPr>
-          <a:p>
-            <a:pPr defTabSz="457200">
-              <a:lnSpc>
-                <a:spcPct val="100000"/>
-              </a:lnSpc>
-            </a:pPr>
-            <a:r>
-              <a:rPr b="1" lang="en-US" sz="3000" spc="-1" strike="noStrike">
-                <a:solidFill>
-                  <a:srgbClr val="263143"/>
-                </a:solidFill>
-                <a:latin typeface="Aptos"/>
-              </a:rPr>
-              <a:t>JUnit 5 makes Hoverfly part of the test lifecycle</a:t>
-            </a:r>
-            <a:endParaRPr b="0" lang="pt-BR" sz="3000" spc="-1" strike="noStrike">
-              <a:solidFill>
-                <a:srgbClr val="000000"/>
-              </a:solidFill>
-              <a:latin typeface="Arial"/>
-            </a:endParaRPr>
-          </a:p>
-        </p:txBody>
-      </p:sp>
-      <p:sp>
-        <p:nvSpPr>
-          <p:cNvPr id="131" name="TextBox 24"/>
-          <p:cNvSpPr/>
-          <p:nvPr/>
-        </p:nvSpPr>
-        <p:spPr>
-          <a:xfrm>
-            <a:off x="10515600" y="320040"/>
-            <a:ext cx="1096560" cy="219240"/>
-          </a:xfrm>
-          <a:prstGeom prst="rect">
-            <a:avLst/>
-          </a:prstGeom>
-          <a:noFill/>
-          <a:ln w="0">
-            <a:noFill/>
-          </a:ln>
-        </p:spPr>
-        <p:style>
-          <a:lnRef idx="0"/>
-          <a:fillRef idx="0"/>
-          <a:effectRef idx="0"/>
-          <a:fontRef idx="minor"/>
-        </p:style>
-        <p:txBody>
-          <a:bodyPr lIns="27360" rIns="27360" tIns="18360" bIns="18360" anchor="t">
-            <a:spAutoFit/>
-          </a:bodyPr>
-          <a:p>
-            <a:pPr algn="r" defTabSz="457200">
-              <a:lnSpc>
-                <a:spcPct val="100000"/>
-              </a:lnSpc>
-            </a:pPr>
-            <a:r>
-              <a:rPr b="1" lang="en-US" sz="1200" spc="-1" strike="noStrike">
-                <a:solidFill>
-                  <a:srgbClr val="5e6c81"/>
-                </a:solidFill>
-                <a:latin typeface="Aptos"/>
-              </a:rPr>
-              <a:t>0:55</a:t>
-            </a:r>
-            <a:endParaRPr b="0" lang="pt-BR" sz="1200" spc="-1" strike="noStrike">
-              <a:solidFill>
-                <a:srgbClr val="000000"/>
-              </a:solidFill>
-              <a:latin typeface="Arial"/>
-            </a:endParaRPr>
-          </a:p>
-        </p:txBody>
-      </p:sp>
-      <p:sp>
-        <p:nvSpPr>
-          <p:cNvPr id="132" name="Rectangle 1"/>
-          <p:cNvSpPr/>
-          <p:nvPr/>
-        </p:nvSpPr>
-        <p:spPr>
-          <a:xfrm>
-            <a:off x="594360" y="1417320"/>
-            <a:ext cx="10972080" cy="22320"/>
-          </a:xfrm>
-          <a:prstGeom prst="rect">
-            <a:avLst/>
-          </a:prstGeom>
-          <a:solidFill>
-            <a:srgbClr val="008996"/>
-          </a:solidFill>
-          <a:ln>
-            <a:solidFill>
-              <a:srgbClr val="3465a4"/>
-            </a:solidFill>
-            <a:round/>
-          </a:ln>
-          <a:effectLst>
-            <a:outerShdw blurRad="39960" dir="5400000" dist="23040" rotWithShape="0">
-              <a:srgbClr val="000000">
-                <a:alpha val="35000"/>
-              </a:srgbClr>
-            </a:outerShdw>
-          </a:effectLst>
-        </p:spPr>
-        <p:style>
-          <a:lnRef idx="1">
-            <a:schemeClr val="accent1"/>
-          </a:lnRef>
-          <a:fillRef idx="3">
-            <a:schemeClr val="accent1"/>
-          </a:fillRef>
-          <a:effectRef idx="2">
-            <a:schemeClr val="accent1"/>
-          </a:effectRef>
-          <a:fontRef idx="minor"/>
-        </p:style>
-        <p:txBody>
-          <a:bodyPr lIns="90000" rIns="90000" tIns="-21960" bIns="-21960" anchor="ctr">
-            <a:noAutofit/>
-          </a:bodyPr>
-          <a:p>
-            <a:pPr algn="ctr" defTabSz="457200">
-              <a:lnSpc>
-                <a:spcPct val="100000"/>
-              </a:lnSpc>
-            </a:pPr>
-            <a:endParaRPr b="0" lang="en-US" sz="1800" spc="-1" strike="noStrike">
-              <a:solidFill>
-                <a:schemeClr val="lt1"/>
-              </a:solidFill>
-              <a:latin typeface="Calibri"/>
-            </a:endParaRPr>
-          </a:p>
-        </p:txBody>
-      </p:sp>
-      <p:sp>
-        <p:nvSpPr>
-          <p:cNvPr id="133" name="Rounded Rectangle 1"/>
-          <p:cNvSpPr/>
-          <p:nvPr/>
-        </p:nvSpPr>
-        <p:spPr>
-          <a:xfrm>
-            <a:off x="685800" y="1783080"/>
-            <a:ext cx="3291120" cy="1828080"/>
-          </a:xfrm>
-          <a:prstGeom prst="roundRect">
-            <a:avLst>
-              <a:gd name="adj" fmla="val 16667"/>
-            </a:avLst>
-          </a:prstGeom>
-          <a:solidFill>
-            <a:srgbClr val="ffffff"/>
-          </a:solidFill>
-          <a:ln>
-            <a:solidFill>
-              <a:srgbClr val="dae2ed"/>
-            </a:solidFill>
-            <a:round/>
-          </a:ln>
-          <a:effectLst>
-            <a:outerShdw blurRad="39960" dir="5400000" dist="23040" rotWithShape="0">
-              <a:srgbClr val="000000">
-                <a:alpha val="35000"/>
-              </a:srgbClr>
-            </a:outerShdw>
-          </a:effectLst>
-        </p:spPr>
-        <p:style>
-          <a:lnRef idx="1">
-            <a:schemeClr val="accent1"/>
-          </a:lnRef>
-          <a:fillRef idx="3">
-            <a:schemeClr val="accent1"/>
-          </a:fillRef>
-          <a:effectRef idx="2">
-            <a:schemeClr val="accent1"/>
-          </a:effectRef>
-          <a:fontRef idx="minor"/>
-        </p:style>
-        <p:txBody>
-          <a:bodyPr lIns="90000" rIns="90000" tIns="45000" bIns="45000" anchor="ctr">
-            <a:noAutofit/>
-          </a:bodyPr>
-          <a:p>
-            <a:pPr algn="ctr" defTabSz="457200">
-              <a:lnSpc>
-                <a:spcPct val="100000"/>
-              </a:lnSpc>
-            </a:pPr>
-            <a:endParaRPr b="0" lang="en-US" sz="1800" spc="-1" strike="noStrike">
-              <a:solidFill>
-                <a:schemeClr val="lt1"/>
-              </a:solidFill>
-              <a:latin typeface="Calibri"/>
-            </a:endParaRPr>
-          </a:p>
-        </p:txBody>
-      </p:sp>
-      <p:sp>
-        <p:nvSpPr>
-          <p:cNvPr id="134" name="TextBox 25"/>
-          <p:cNvSpPr/>
-          <p:nvPr/>
-        </p:nvSpPr>
-        <p:spPr>
-          <a:xfrm>
-            <a:off x="887040" y="1947600"/>
-            <a:ext cx="2888640" cy="325800"/>
-          </a:xfrm>
-          <a:prstGeom prst="rect">
-            <a:avLst/>
-          </a:prstGeom>
-          <a:noFill/>
-          <a:ln w="0">
-            <a:noFill/>
-          </a:ln>
-        </p:spPr>
-        <p:style>
-          <a:lnRef idx="0"/>
-          <a:fillRef idx="0"/>
-          <a:effectRef idx="0"/>
-          <a:fontRef idx="minor"/>
-        </p:style>
-        <p:txBody>
-          <a:bodyPr lIns="27360" rIns="27360" tIns="18360" bIns="18360" anchor="t">
-            <a:spAutoFit/>
-          </a:bodyPr>
-          <a:p>
-            <a:pPr defTabSz="457200">
-              <a:lnSpc>
-                <a:spcPct val="100000"/>
-              </a:lnSpc>
-            </a:pPr>
-            <a:r>
-              <a:rPr b="1" lang="en-US" sz="1900" spc="-1" strike="noStrike">
-                <a:solidFill>
-                  <a:srgbClr val="008996"/>
-                </a:solidFill>
-                <a:latin typeface="Aptos"/>
-              </a:rPr>
-              <a:t>1  Configure</a:t>
-            </a:r>
-            <a:endParaRPr b="0" lang="pt-BR" sz="1900" spc="-1" strike="noStrike">
-              <a:solidFill>
-                <a:srgbClr val="000000"/>
-              </a:solidFill>
-              <a:latin typeface="Arial"/>
-            </a:endParaRPr>
-          </a:p>
-        </p:txBody>
-      </p:sp>
-      <p:sp>
-        <p:nvSpPr>
-          <p:cNvPr id="135" name="TextBox 26"/>
-          <p:cNvSpPr/>
-          <p:nvPr/>
-        </p:nvSpPr>
-        <p:spPr>
-          <a:xfrm>
-            <a:off x="887040" y="2441520"/>
-            <a:ext cx="2888640" cy="554760"/>
-          </a:xfrm>
-          <a:prstGeom prst="rect">
-            <a:avLst/>
-          </a:prstGeom>
-          <a:noFill/>
-          <a:ln w="0">
-            <a:noFill/>
-          </a:ln>
-        </p:spPr>
-        <p:style>
-          <a:lnRef idx="0"/>
-          <a:fillRef idx="0"/>
-          <a:effectRef idx="0"/>
-          <a:fontRef idx="minor"/>
-        </p:style>
-        <p:txBody>
-          <a:bodyPr lIns="27360" rIns="27360" tIns="18360" bIns="18360" anchor="t">
-            <a:spAutoFit/>
-          </a:bodyPr>
-          <a:p>
-            <a:pPr defTabSz="457200">
-              <a:lnSpc>
-                <a:spcPct val="100000"/>
-              </a:lnSpc>
-            </a:pPr>
-            <a:r>
-              <a:rPr b="0" lang="en-US" sz="1700" spc="-1" strike="noStrike">
-                <a:solidFill>
-                  <a:srgbClr val="263143"/>
-                </a:solidFill>
-                <a:latin typeface="Aptos"/>
-              </a:rPr>
-              <a:t>Register HoverflyExtension and select the mode.</a:t>
-            </a:r>
-            <a:endParaRPr b="0" lang="pt-BR" sz="1700" spc="-1" strike="noStrike">
-              <a:solidFill>
-                <a:srgbClr val="000000"/>
-              </a:solidFill>
-              <a:latin typeface="Arial"/>
-            </a:endParaRPr>
-          </a:p>
-        </p:txBody>
-      </p:sp>
-      <p:sp>
-        <p:nvSpPr>
-          <p:cNvPr id="136" name="Rounded Rectangle 2"/>
-          <p:cNvSpPr/>
-          <p:nvPr/>
-        </p:nvSpPr>
-        <p:spPr>
-          <a:xfrm>
-            <a:off x="4434840" y="1783080"/>
-            <a:ext cx="3291120" cy="1828080"/>
-          </a:xfrm>
-          <a:prstGeom prst="roundRect">
-            <a:avLst>
-              <a:gd name="adj" fmla="val 16667"/>
-            </a:avLst>
-          </a:prstGeom>
-          <a:solidFill>
-            <a:srgbClr val="ffffff"/>
-          </a:solidFill>
-          <a:ln>
-            <a:solidFill>
-              <a:srgbClr val="dae2ed"/>
-            </a:solidFill>
-            <a:round/>
-          </a:ln>
-          <a:effectLst>
-            <a:outerShdw blurRad="39960" dir="5400000" dist="23040" rotWithShape="0">
-              <a:srgbClr val="000000">
-                <a:alpha val="35000"/>
-              </a:srgbClr>
-            </a:outerShdw>
-          </a:effectLst>
-        </p:spPr>
-        <p:style>
-          <a:lnRef idx="1">
-            <a:schemeClr val="accent1"/>
-          </a:lnRef>
-          <a:fillRef idx="3">
-            <a:schemeClr val="accent1"/>
-          </a:fillRef>
-          <a:effectRef idx="2">
-            <a:schemeClr val="accent1"/>
-          </a:effectRef>
-          <a:fontRef idx="minor"/>
-        </p:style>
-        <p:txBody>
-          <a:bodyPr lIns="90000" rIns="90000" tIns="45000" bIns="45000" anchor="ctr">
-            <a:noAutofit/>
-          </a:bodyPr>
-          <a:p>
-            <a:pPr algn="ctr" defTabSz="457200">
-              <a:lnSpc>
-                <a:spcPct val="100000"/>
-              </a:lnSpc>
-            </a:pPr>
-            <a:endParaRPr b="0" lang="en-US" sz="1800" spc="-1" strike="noStrike">
-              <a:solidFill>
-                <a:schemeClr val="lt1"/>
-              </a:solidFill>
-              <a:latin typeface="Calibri"/>
-            </a:endParaRPr>
-          </a:p>
-        </p:txBody>
-      </p:sp>
-      <p:sp>
-        <p:nvSpPr>
-          <p:cNvPr id="137" name="TextBox 27"/>
-          <p:cNvSpPr/>
-          <p:nvPr/>
-        </p:nvSpPr>
-        <p:spPr>
-          <a:xfrm>
-            <a:off x="4636080" y="1947600"/>
-            <a:ext cx="2888640" cy="325800"/>
-          </a:xfrm>
-          <a:prstGeom prst="rect">
-            <a:avLst/>
-          </a:prstGeom>
-          <a:noFill/>
-          <a:ln w="0">
-            <a:noFill/>
-          </a:ln>
-        </p:spPr>
-        <p:style>
-          <a:lnRef idx="0"/>
-          <a:fillRef idx="0"/>
-          <a:effectRef idx="0"/>
-          <a:fontRef idx="minor"/>
-        </p:style>
-        <p:txBody>
-          <a:bodyPr lIns="27360" rIns="27360" tIns="18360" bIns="18360" anchor="t">
-            <a:spAutoFit/>
-          </a:bodyPr>
-          <a:p>
-            <a:pPr defTabSz="457200">
-              <a:lnSpc>
-                <a:spcPct val="100000"/>
-              </a:lnSpc>
-            </a:pPr>
-            <a:r>
-              <a:rPr b="1" lang="en-US" sz="1900" spc="-1" strike="noStrike">
-                <a:solidFill>
-                  <a:srgbClr val="6f4cbe"/>
-                </a:solidFill>
-                <a:latin typeface="Aptos"/>
-              </a:rPr>
-              <a:t>2  Send request</a:t>
-            </a:r>
-            <a:endParaRPr b="0" lang="pt-BR" sz="1900" spc="-1" strike="noStrike">
-              <a:solidFill>
-                <a:srgbClr val="000000"/>
-              </a:solidFill>
-              <a:latin typeface="Arial"/>
-            </a:endParaRPr>
-          </a:p>
-        </p:txBody>
-      </p:sp>
-      <p:sp>
-        <p:nvSpPr>
-          <p:cNvPr id="138" name="TextBox 28"/>
-          <p:cNvSpPr/>
-          <p:nvPr/>
-        </p:nvSpPr>
-        <p:spPr>
-          <a:xfrm>
-            <a:off x="4636080" y="2441520"/>
-            <a:ext cx="2888640" cy="813960"/>
-          </a:xfrm>
-          <a:prstGeom prst="rect">
-            <a:avLst/>
-          </a:prstGeom>
-          <a:noFill/>
-          <a:ln w="0">
-            <a:noFill/>
-          </a:ln>
-        </p:spPr>
-        <p:style>
-          <a:lnRef idx="0"/>
-          <a:fillRef idx="0"/>
-          <a:effectRef idx="0"/>
-          <a:fontRef idx="minor"/>
-        </p:style>
-        <p:txBody>
-          <a:bodyPr lIns="27360" rIns="27360" tIns="18360" bIns="18360" anchor="t">
-            <a:spAutoFit/>
-          </a:bodyPr>
-          <a:p>
-            <a:pPr defTabSz="457200">
-              <a:lnSpc>
-                <a:spcPct val="100000"/>
-              </a:lnSpc>
-            </a:pPr>
-            <a:r>
-              <a:rPr b="0" lang="en-US" sz="1700" spc="-1" strike="noStrike">
-                <a:solidFill>
-                  <a:srgbClr val="263143"/>
-                </a:solidFill>
-                <a:latin typeface="Aptos"/>
-              </a:rPr>
-              <a:t>Your Spring HTTP client calls the dependency as usual.</a:t>
-            </a:r>
-            <a:endParaRPr b="0" lang="pt-BR" sz="1700" spc="-1" strike="noStrike">
-              <a:solidFill>
-                <a:srgbClr val="000000"/>
-              </a:solidFill>
-              <a:latin typeface="Arial"/>
-            </a:endParaRPr>
-          </a:p>
-        </p:txBody>
-      </p:sp>
-      <p:sp>
-        <p:nvSpPr>
-          <p:cNvPr id="139" name="Rounded Rectangle 3"/>
-          <p:cNvSpPr/>
-          <p:nvPr/>
-        </p:nvSpPr>
-        <p:spPr>
-          <a:xfrm>
-            <a:off x="8183880" y="1783080"/>
-            <a:ext cx="3291120" cy="1828080"/>
-          </a:xfrm>
-          <a:prstGeom prst="roundRect">
-            <a:avLst>
-              <a:gd name="adj" fmla="val 16667"/>
-            </a:avLst>
-          </a:prstGeom>
-          <a:solidFill>
-            <a:srgbClr val="ffffff"/>
-          </a:solidFill>
-          <a:ln>
-            <a:solidFill>
-              <a:srgbClr val="dae2ed"/>
-            </a:solidFill>
-            <a:round/>
-          </a:ln>
-          <a:effectLst>
-            <a:outerShdw blurRad="39960" dir="5400000" dist="23040" rotWithShape="0">
-              <a:srgbClr val="000000">
-                <a:alpha val="35000"/>
-              </a:srgbClr>
-            </a:outerShdw>
-          </a:effectLst>
-        </p:spPr>
-        <p:style>
-          <a:lnRef idx="1">
-            <a:schemeClr val="accent1"/>
-          </a:lnRef>
-          <a:fillRef idx="3">
-            <a:schemeClr val="accent1"/>
-          </a:fillRef>
-          <a:effectRef idx="2">
-            <a:schemeClr val="accent1"/>
-          </a:effectRef>
-          <a:fontRef idx="minor"/>
-        </p:style>
-        <p:txBody>
-          <a:bodyPr lIns="90000" rIns="90000" tIns="45000" bIns="45000" anchor="ctr">
-            <a:noAutofit/>
-          </a:bodyPr>
-          <a:p>
-            <a:pPr algn="ctr" defTabSz="457200">
-              <a:lnSpc>
-                <a:spcPct val="100000"/>
-              </a:lnSpc>
-            </a:pPr>
-            <a:endParaRPr b="0" lang="en-US" sz="1800" spc="-1" strike="noStrike">
-              <a:solidFill>
-                <a:schemeClr val="lt1"/>
-              </a:solidFill>
-              <a:latin typeface="Calibri"/>
-            </a:endParaRPr>
-          </a:p>
-        </p:txBody>
-      </p:sp>
-      <p:sp>
-        <p:nvSpPr>
-          <p:cNvPr id="140" name="TextBox 29"/>
-          <p:cNvSpPr/>
-          <p:nvPr/>
-        </p:nvSpPr>
-        <p:spPr>
-          <a:xfrm>
-            <a:off x="8385120" y="1947600"/>
-            <a:ext cx="2888640" cy="325800"/>
-          </a:xfrm>
-          <a:prstGeom prst="rect">
-            <a:avLst/>
-          </a:prstGeom>
-          <a:noFill/>
-          <a:ln w="0">
-            <a:noFill/>
-          </a:ln>
-        </p:spPr>
-        <p:style>
-          <a:lnRef idx="0"/>
-          <a:fillRef idx="0"/>
-          <a:effectRef idx="0"/>
-          <a:fontRef idx="minor"/>
-        </p:style>
-        <p:txBody>
-          <a:bodyPr lIns="27360" rIns="27360" tIns="18360" bIns="18360" anchor="t">
-            <a:spAutoFit/>
-          </a:bodyPr>
-          <a:p>
-            <a:pPr defTabSz="457200">
-              <a:lnSpc>
-                <a:spcPct val="100000"/>
-              </a:lnSpc>
-            </a:pPr>
-            <a:r>
-              <a:rPr b="1" lang="en-US" sz="1900" spc="-1" strike="noStrike">
-                <a:solidFill>
-                  <a:srgbClr val="1b7d52"/>
-                </a:solidFill>
-                <a:latin typeface="Aptos"/>
-              </a:rPr>
-              <a:t>3  Assert behavior</a:t>
-            </a:r>
-            <a:endParaRPr b="0" lang="pt-BR" sz="1900" spc="-1" strike="noStrike">
-              <a:solidFill>
-                <a:srgbClr val="000000"/>
-              </a:solidFill>
-              <a:latin typeface="Arial"/>
-            </a:endParaRPr>
-          </a:p>
-        </p:txBody>
-      </p:sp>
-      <p:sp>
-        <p:nvSpPr>
-          <p:cNvPr id="141" name="TextBox 30"/>
-          <p:cNvSpPr/>
-          <p:nvPr/>
-        </p:nvSpPr>
-        <p:spPr>
-          <a:xfrm>
-            <a:off x="8385120" y="2441520"/>
-            <a:ext cx="2888640" cy="813960"/>
-          </a:xfrm>
-          <a:prstGeom prst="rect">
-            <a:avLst/>
-          </a:prstGeom>
-          <a:noFill/>
-          <a:ln w="0">
-            <a:noFill/>
-          </a:ln>
-        </p:spPr>
-        <p:style>
-          <a:lnRef idx="0"/>
-          <a:fillRef idx="0"/>
-          <a:effectRef idx="0"/>
-          <a:fontRef idx="minor"/>
-        </p:style>
-        <p:txBody>
-          <a:bodyPr lIns="27360" rIns="27360" tIns="18360" bIns="18360" anchor="t">
-            <a:spAutoFit/>
-          </a:bodyPr>
-          <a:p>
-            <a:pPr defTabSz="457200">
-              <a:lnSpc>
-                <a:spcPct val="100000"/>
-              </a:lnSpc>
-            </a:pPr>
-            <a:r>
-              <a:rPr b="0" lang="en-US" sz="1700" spc="-1" strike="noStrike">
-                <a:solidFill>
-                  <a:srgbClr val="263143"/>
-                </a:solidFill>
-                <a:latin typeface="Aptos"/>
-              </a:rPr>
-              <a:t>Verify the application’s result, independent of accidental API changes.</a:t>
-            </a:r>
-            <a:endParaRPr b="0" lang="pt-BR" sz="1700" spc="-1" strike="noStrike">
-              <a:solidFill>
-                <a:srgbClr val="000000"/>
-              </a:solidFill>
-              <a:latin typeface="Arial"/>
-            </a:endParaRPr>
-          </a:p>
-        </p:txBody>
-      </p:sp>
-      <p:sp>
-        <p:nvSpPr>
-          <p:cNvPr id="142" name="TextBox 31"/>
-          <p:cNvSpPr/>
-          <p:nvPr/>
-        </p:nvSpPr>
-        <p:spPr>
-          <a:xfrm>
-            <a:off x="868680" y="4160520"/>
-            <a:ext cx="10514880" cy="310680"/>
-          </a:xfrm>
-          <a:prstGeom prst="rect">
-            <a:avLst/>
-          </a:prstGeom>
-          <a:noFill/>
-          <a:ln w="0">
-            <a:noFill/>
-          </a:ln>
-        </p:spPr>
-        <p:style>
-          <a:lnRef idx="0"/>
-          <a:fillRef idx="0"/>
-          <a:effectRef idx="0"/>
-          <a:fontRef idx="minor"/>
-        </p:style>
-        <p:txBody>
-          <a:bodyPr lIns="27360" rIns="27360" tIns="18360" bIns="18360" anchor="t">
-            <a:spAutoFit/>
-          </a:bodyPr>
-          <a:p>
-            <a:pPr defTabSz="457200">
-              <a:lnSpc>
-                <a:spcPct val="100000"/>
-              </a:lnSpc>
-            </a:pPr>
-            <a:r>
-              <a:rPr b="1" lang="en-US" sz="1800" spc="-1" strike="noStrike">
-                <a:solidFill>
-                  <a:srgbClr val="008996"/>
-                </a:solidFill>
-                <a:latin typeface="Aptos"/>
-              </a:rPr>
-              <a:t>Typical test flow</a:t>
-            </a:r>
-            <a:endParaRPr b="0" lang="pt-BR" sz="1800" spc="-1" strike="noStrike">
-              <a:solidFill>
-                <a:srgbClr val="000000"/>
-              </a:solidFill>
-              <a:latin typeface="Arial"/>
-            </a:endParaRPr>
-          </a:p>
-        </p:txBody>
-      </p:sp>
-      <p:sp>
-        <p:nvSpPr>
-          <p:cNvPr id="143" name="Rounded Rectangle 4"/>
-          <p:cNvSpPr/>
-          <p:nvPr/>
-        </p:nvSpPr>
-        <p:spPr>
-          <a:xfrm>
-            <a:off x="868680" y="4572000"/>
-            <a:ext cx="6765840" cy="1142280"/>
-          </a:xfrm>
-          <a:prstGeom prst="roundRect">
-            <a:avLst>
-              <a:gd name="adj" fmla="val 16667"/>
-            </a:avLst>
-          </a:prstGeom>
-          <a:solidFill>
-            <a:srgbClr val="eff3f9"/>
-          </a:solidFill>
-          <a:ln>
-            <a:solidFill>
-              <a:srgbClr val="dae2ed"/>
-            </a:solidFill>
-            <a:round/>
-          </a:ln>
-          <a:effectLst>
-            <a:outerShdw blurRad="39960" dir="5400000" dist="23040" rotWithShape="0">
-              <a:srgbClr val="000000">
-                <a:alpha val="35000"/>
-              </a:srgbClr>
-            </a:outerShdw>
-          </a:effectLst>
-        </p:spPr>
-        <p:style>
-          <a:lnRef idx="1">
-            <a:schemeClr val="accent1"/>
-          </a:lnRef>
-          <a:fillRef idx="3">
-            <a:schemeClr val="accent1"/>
-          </a:fillRef>
-          <a:effectRef idx="2">
-            <a:schemeClr val="accent1"/>
-          </a:effectRef>
-          <a:fontRef idx="minor"/>
-        </p:style>
-        <p:txBody>
-          <a:bodyPr lIns="90000" rIns="90000" tIns="45000" bIns="45000" anchor="ctr">
-            <a:noAutofit/>
-          </a:bodyPr>
-          <a:p>
-            <a:pPr algn="ctr" defTabSz="457200">
-              <a:lnSpc>
-                <a:spcPct val="100000"/>
-              </a:lnSpc>
-            </a:pPr>
-            <a:endParaRPr b="0" lang="en-US" sz="1800" spc="-1" strike="noStrike">
-              <a:solidFill>
-                <a:schemeClr val="lt1"/>
-              </a:solidFill>
-              <a:latin typeface="Calibri"/>
-            </a:endParaRPr>
-          </a:p>
-        </p:txBody>
-      </p:sp>
-      <p:sp>
-        <p:nvSpPr>
-          <p:cNvPr id="144" name="TextBox 32"/>
-          <p:cNvSpPr/>
-          <p:nvPr/>
-        </p:nvSpPr>
-        <p:spPr>
-          <a:xfrm>
-            <a:off x="1078920" y="4709160"/>
-            <a:ext cx="6308640" cy="1103760"/>
-          </a:xfrm>
-          <a:prstGeom prst="rect">
-            <a:avLst/>
-          </a:prstGeom>
-          <a:noFill/>
-          <a:ln w="0">
-            <a:noFill/>
-          </a:ln>
-        </p:spPr>
-        <p:style>
-          <a:lnRef idx="0"/>
-          <a:fillRef idx="0"/>
-          <a:effectRef idx="0"/>
-          <a:fontRef idx="minor"/>
-        </p:style>
-        <p:txBody>
-          <a:bodyPr lIns="27360" rIns="27360" tIns="18360" bIns="18360" anchor="t">
-            <a:spAutoFit/>
-          </a:bodyPr>
-          <a:p>
-            <a:pPr>
-              <a:lnSpc>
-                <a:spcPct val="100000"/>
-              </a:lnSpc>
-            </a:pPr>
-            <a:r>
-              <a:rPr b="0" lang="en-US" sz="1400" spc="-1" strike="noStrike">
-                <a:solidFill>
-                  <a:srgbClr val="1b7d52"/>
-                </a:solidFill>
-                <a:latin typeface="Consolas"/>
-              </a:rPr>
-              <a:t>@ExtendWith(HoverflyExtension.class)</a:t>
-            </a:r>
-            <a:endParaRPr b="0" lang="pt-BR" sz="1400" spc="-1" strike="noStrike">
-              <a:solidFill>
-                <a:srgbClr val="000000"/>
-              </a:solidFill>
-              <a:latin typeface="Arial"/>
-            </a:endParaRPr>
-          </a:p>
-          <a:p>
-            <a:pPr>
-              <a:lnSpc>
-                <a:spcPct val="100000"/>
-              </a:lnSpc>
-            </a:pPr>
-            <a:r>
-              <a:rPr b="0" lang="en-US" sz="1400" spc="-1" strike="noStrike">
-                <a:solidFill>
-                  <a:srgbClr val="1b7d52"/>
-                </a:solidFill>
-                <a:latin typeface="Consolas"/>
-              </a:rPr>
-              <a:t>class CurrencyClientTest {</a:t>
-            </a:r>
-            <a:endParaRPr b="0" lang="pt-BR" sz="1400" spc="-1" strike="noStrike">
-              <a:solidFill>
-                <a:srgbClr val="000000"/>
-              </a:solidFill>
-              <a:latin typeface="Arial"/>
-            </a:endParaRPr>
-          </a:p>
-          <a:p>
-            <a:pPr>
-              <a:lnSpc>
-                <a:spcPct val="100000"/>
-              </a:lnSpc>
-            </a:pPr>
-            <a:r>
-              <a:rPr b="0" lang="en-US" sz="1400" spc="-1" strike="noStrike">
-                <a:solidFill>
-                  <a:srgbClr val="1b7d52"/>
-                </a:solidFill>
-                <a:latin typeface="Consolas"/>
-              </a:rPr>
-              <a:t>    </a:t>
-            </a:r>
-            <a:r>
-              <a:rPr b="0" lang="en-US" sz="1400" spc="-1" strike="noStrike">
-                <a:solidFill>
-                  <a:srgbClr val="1b7d52"/>
-                </a:solidFill>
-                <a:latin typeface="Consolas"/>
-              </a:rPr>
-              <a:t>// Configure Hoverfly mode and middleware</a:t>
-            </a:r>
-            <a:endParaRPr b="0" lang="pt-BR" sz="1400" spc="-1" strike="noStrike">
-              <a:solidFill>
-                <a:srgbClr val="000000"/>
-              </a:solidFill>
-              <a:latin typeface="Arial"/>
-            </a:endParaRPr>
-          </a:p>
-          <a:p>
-            <a:pPr>
-              <a:lnSpc>
-                <a:spcPct val="100000"/>
-              </a:lnSpc>
-            </a:pPr>
-            <a:r>
-              <a:rPr b="0" lang="en-US" sz="1400" spc="-1" strike="noStrike">
-                <a:solidFill>
-                  <a:srgbClr val="1b7d52"/>
-                </a:solidFill>
-                <a:latin typeface="Consolas"/>
-              </a:rPr>
-              <a:t>    </a:t>
-            </a:r>
-            <a:r>
-              <a:rPr b="0" lang="en-US" sz="1400" spc="-1" strike="noStrike">
-                <a:solidFill>
-                  <a:srgbClr val="1b7d52"/>
-                </a:solidFill>
-                <a:latin typeface="Consolas"/>
-              </a:rPr>
-              <a:t>// Exercise the Spring client; assert the result</a:t>
-            </a:r>
-            <a:endParaRPr b="0" lang="pt-BR" sz="1400" spc="-1" strike="noStrike">
-              <a:solidFill>
-                <a:srgbClr val="000000"/>
-              </a:solidFill>
-              <a:latin typeface="Arial"/>
-            </a:endParaRPr>
-          </a:p>
-          <a:p>
-            <a:pPr defTabSz="457200">
-              <a:lnSpc>
-                <a:spcPct val="100000"/>
-              </a:lnSpc>
-            </a:pPr>
-            <a:r>
-              <a:rPr b="0" lang="en-US" sz="1400" spc="-1" strike="noStrike">
-                <a:solidFill>
-                  <a:srgbClr val="1b7d52"/>
-                </a:solidFill>
-                <a:latin typeface="Consolas"/>
-              </a:rPr>
-              <a:t>}</a:t>
-            </a:r>
-            <a:endParaRPr b="0" lang="pt-BR" sz="1400" spc="-1" strike="noStrike">
-              <a:solidFill>
-                <a:srgbClr val="000000"/>
-              </a:solidFill>
-              <a:latin typeface="Arial"/>
-            </a:endParaRPr>
-          </a:p>
-        </p:txBody>
-      </p:sp>
-      <p:sp>
-        <p:nvSpPr>
-          <p:cNvPr id="145" name="TextBox 33"/>
-          <p:cNvSpPr/>
-          <p:nvPr/>
-        </p:nvSpPr>
-        <p:spPr>
-          <a:xfrm>
-            <a:off x="8046720" y="4663440"/>
-            <a:ext cx="3199680" cy="767520"/>
-          </a:xfrm>
-          <a:prstGeom prst="rect">
-            <a:avLst/>
-          </a:prstGeom>
-          <a:noFill/>
-          <a:ln w="0">
-            <a:noFill/>
-          </a:ln>
-        </p:spPr>
-        <p:style>
-          <a:lnRef idx="0"/>
-          <a:fillRef idx="0"/>
-          <a:effectRef idx="0"/>
-          <a:fontRef idx="minor"/>
-        </p:style>
-        <p:txBody>
-          <a:bodyPr lIns="27360" rIns="27360" tIns="18360" bIns="18360" anchor="t">
-            <a:spAutoFit/>
-          </a:bodyPr>
-          <a:p>
-            <a:pPr defTabSz="457200">
-              <a:lnSpc>
-                <a:spcPct val="100000"/>
-              </a:lnSpc>
-            </a:pPr>
-            <a:r>
-              <a:rPr b="0" lang="en-US" sz="1600" spc="-1" strike="noStrike">
-                <a:solidFill>
-                  <a:srgbClr val="5e6c81"/>
-                </a:solidFill>
-                <a:latin typeface="Aptos"/>
-              </a:rPr>
-              <a:t>The JUnit 5 extension starts/stops Hoverfly and resets state between tests.</a:t>
-            </a:r>
-            <a:endParaRPr b="0" lang="pt-BR" sz="1600" spc="-1" strike="noStrike">
-              <a:solidFill>
-                <a:srgbClr val="000000"/>
-              </a:solidFill>
-              <a:latin typeface="Arial"/>
-            </a:endParaRPr>
-          </a:p>
-        </p:txBody>
-      </p:sp>
-      <p:sp>
-        <p:nvSpPr>
-          <p:cNvPr id="146" name="TextBox 34"/>
-          <p:cNvSpPr/>
-          <p:nvPr/>
-        </p:nvSpPr>
-        <p:spPr>
-          <a:xfrm>
-            <a:off x="594360" y="6528960"/>
-            <a:ext cx="7314480" cy="173880"/>
-          </a:xfrm>
-          <a:prstGeom prst="rect">
-            <a:avLst/>
-          </a:prstGeom>
-          <a:noFill/>
-          <a:ln w="0">
-            <a:noFill/>
-          </a:ln>
-        </p:spPr>
-        <p:style>
-          <a:lnRef idx="0"/>
-          <a:fillRef idx="0"/>
-          <a:effectRef idx="0"/>
-          <a:fontRef idx="minor"/>
-        </p:style>
-        <p:txBody>
-          <a:bodyPr lIns="27360" rIns="27360" tIns="18360" bIns="18360" anchor="t">
-            <a:spAutoFit/>
-          </a:bodyPr>
-          <a:p>
-            <a:pPr defTabSz="457200">
-              <a:lnSpc>
-                <a:spcPct val="100000"/>
-              </a:lnSpc>
-            </a:pPr>
-            <a:r>
-              <a:rPr b="0" lang="en-US" sz="900" spc="-1" strike="noStrike">
-                <a:solidFill>
-                  <a:srgbClr val="5e6c81"/>
-                </a:solidFill>
-                <a:latin typeface="Aptos"/>
-              </a:rPr>
-              <a:t>HOVERFLY  /  API SIMULATION FOR TESTING</a:t>
-            </a:r>
-            <a:endParaRPr b="0" lang="pt-BR" sz="900" spc="-1" strike="noStrike">
-              <a:solidFill>
-                <a:srgbClr val="000000"/>
-              </a:solidFill>
-              <a:latin typeface="Arial"/>
-            </a:endParaRPr>
-          </a:p>
-        </p:txBody>
-      </p:sp>
-      <p:sp>
-        <p:nvSpPr>
-          <p:cNvPr id="147" name="TextBox 35"/>
-          <p:cNvSpPr/>
-          <p:nvPr/>
-        </p:nvSpPr>
-        <p:spPr>
-          <a:xfrm>
-            <a:off x="10972800" y="6492240"/>
-            <a:ext cx="547920" cy="189000"/>
-          </a:xfrm>
-          <a:prstGeom prst="rect">
-            <a:avLst/>
-          </a:prstGeom>
-          <a:noFill/>
-          <a:ln w="0">
-            <a:noFill/>
-          </a:ln>
-        </p:spPr>
-        <p:style>
-          <a:lnRef idx="0"/>
-          <a:fillRef idx="0"/>
-          <a:effectRef idx="0"/>
-          <a:fontRef idx="minor"/>
-        </p:style>
-        <p:txBody>
-          <a:bodyPr lIns="27360" rIns="27360" tIns="18360" bIns="18360" anchor="t">
-            <a:spAutoFit/>
-          </a:bodyPr>
-          <a:p>
-            <a:pPr algn="r" defTabSz="457200">
-              <a:lnSpc>
-                <a:spcPct val="100000"/>
-              </a:lnSpc>
-            </a:pPr>
-            <a:r>
-              <a:rPr b="1" lang="en-US" sz="1000" spc="-1" strike="noStrike">
-                <a:solidFill>
-                  <a:srgbClr val="5e6c81"/>
-                </a:solidFill>
-                <a:latin typeface="Aptos"/>
-              </a:rPr>
-              <a:t>05</a:t>
-            </a:r>
-            <a:endParaRPr b="0" lang="pt-BR" sz="1000" spc="-1" strike="noStrike">
-              <a:solidFill>
-                <a:srgbClr val="000000"/>
-              </a:solidFill>
-              <a:latin typeface="Arial"/>
-            </a:endParaRPr>
-          </a:p>
-        </p:txBody>
-      </p:sp>
-    </p:spTree>
-  </p:cSld>
-  <mc:AlternateContent>
-    <mc:Choice Requires="p14">
-      <p:transition spd="slow" p14:dur="2000"/>
-    </mc:Choice>
-    <mc:Fallback>
-      <p:transition spd="slow"/>
-    </mc:Fallback>
-  </mc:AlternateContent>
-</p:sld>
-</file>
-
-<file path=ppt/slides/slide8.xml><?xml version="1.0" encoding="utf-8"?>
-<p:sld xmlns:a="http://schemas.openxmlformats.org/drawingml/2006/main" xmlns:p="http://schemas.openxmlformats.org/presentationml/2006/main" xmlns:r="http://schemas.openxmlformats.org/officeDocument/2006/relationships" xmlns:p14="http://schemas.microsoft.com/office/powerpoint/2010/main" xmlns:p15="http://schemas.microsoft.com/office/powerpoint/2012/main" xmlns:mc="http://schemas.openxmlformats.org/markup-compatibility/2006" show="0">
-  <p:cSld>
-    <p:bg>
-      <p:bgPr>
-        <a:solidFill>
-          <a:srgbClr val="f8fafd"/>
-        </a:solidFill>
-      </p:bgPr>
-    </p:bg>
-    <p:spTree>
-      <p:nvGrpSpPr>
-        <p:cNvPr id="1" name=""/>
-        <p:cNvGrpSpPr/>
-        <p:nvPr/>
-      </p:nvGrpSpPr>
-      <p:grpSpPr>
-        <a:xfrm>
-          <a:off x="0" y="0"/>
-          <a:ext cx="0" cy="0"/>
-          <a:chOff x="0" y="0"/>
-          <a:chExt cx="0" cy="0"/>
-        </a:xfrm>
-      </p:grpSpPr>
-      <p:sp>
-        <p:nvSpPr>
-          <p:cNvPr id="148" name="TextBox 2"/>
-          <p:cNvSpPr/>
-          <p:nvPr/>
-        </p:nvSpPr>
-        <p:spPr>
-          <a:xfrm>
-            <a:off x="594360" y="658440"/>
-            <a:ext cx="10880640" cy="493560"/>
-          </a:xfrm>
-          <a:prstGeom prst="rect">
-            <a:avLst/>
-          </a:prstGeom>
-          <a:noFill/>
-          <a:ln w="0">
-            <a:noFill/>
-          </a:ln>
-        </p:spPr>
-        <p:style>
-          <a:lnRef idx="0"/>
-          <a:fillRef idx="0"/>
-          <a:effectRef idx="0"/>
-          <a:fontRef idx="minor"/>
-        </p:style>
-        <p:txBody>
-          <a:bodyPr lIns="27360" rIns="27360" tIns="18360" bIns="18360" anchor="t">
-            <a:spAutoFit/>
-          </a:bodyPr>
-          <a:p>
-            <a:pPr defTabSz="457200">
-              <a:lnSpc>
-                <a:spcPct val="100000"/>
-              </a:lnSpc>
-            </a:pPr>
-            <a:r>
-              <a:rPr b="1" lang="en-US" sz="3000" spc="-1" strike="noStrike">
-                <a:solidFill>
-                  <a:srgbClr val="263143"/>
-                </a:solidFill>
-                <a:latin typeface="Aptos"/>
-              </a:rPr>
-              <a:t>Middleware adds behavior beyond static mocks</a:t>
-            </a:r>
-            <a:endParaRPr b="0" lang="pt-BR" sz="3000" spc="-1" strike="noStrike">
-              <a:solidFill>
-                <a:srgbClr val="000000"/>
-              </a:solidFill>
-              <a:latin typeface="Arial"/>
-            </a:endParaRPr>
-          </a:p>
-        </p:txBody>
-      </p:sp>
-      <p:sp>
-        <p:nvSpPr>
-          <p:cNvPr id="149" name="TextBox 3"/>
-          <p:cNvSpPr/>
-          <p:nvPr/>
-        </p:nvSpPr>
-        <p:spPr>
-          <a:xfrm>
-            <a:off x="10515600" y="320040"/>
-            <a:ext cx="1096560" cy="219240"/>
-          </a:xfrm>
-          <a:prstGeom prst="rect">
-            <a:avLst/>
-          </a:prstGeom>
-          <a:noFill/>
-          <a:ln w="0">
-            <a:noFill/>
-          </a:ln>
-        </p:spPr>
-        <p:style>
-          <a:lnRef idx="0"/>
-          <a:fillRef idx="0"/>
-          <a:effectRef idx="0"/>
-          <a:fontRef idx="minor"/>
-        </p:style>
-        <p:txBody>
-          <a:bodyPr lIns="27360" rIns="27360" tIns="18360" bIns="18360" anchor="t">
-            <a:spAutoFit/>
-          </a:bodyPr>
-          <a:p>
-            <a:pPr algn="r" defTabSz="457200">
-              <a:lnSpc>
-                <a:spcPct val="100000"/>
-              </a:lnSpc>
-            </a:pPr>
-            <a:r>
-              <a:rPr b="1" lang="en-US" sz="1200" spc="-1" strike="noStrike">
-                <a:solidFill>
-                  <a:srgbClr val="5e6c81"/>
-                </a:solidFill>
-                <a:latin typeface="Aptos"/>
-              </a:rPr>
-              <a:t>0:55</a:t>
-            </a:r>
-            <a:endParaRPr b="0" lang="pt-BR" sz="1200" spc="-1" strike="noStrike">
-              <a:solidFill>
-                <a:srgbClr val="000000"/>
-              </a:solidFill>
-              <a:latin typeface="Arial"/>
-            </a:endParaRPr>
-          </a:p>
-        </p:txBody>
-      </p:sp>
-      <p:sp>
-        <p:nvSpPr>
-          <p:cNvPr id="150" name="Rectangle 4"/>
-          <p:cNvSpPr/>
-          <p:nvPr/>
-        </p:nvSpPr>
-        <p:spPr>
-          <a:xfrm>
-            <a:off x="594360" y="1417320"/>
-            <a:ext cx="10972080" cy="22320"/>
-          </a:xfrm>
-          <a:prstGeom prst="rect">
-            <a:avLst/>
-          </a:prstGeom>
-          <a:solidFill>
-            <a:srgbClr val="008996"/>
-          </a:solidFill>
-          <a:ln>
-            <a:solidFill>
-              <a:srgbClr val="3465a4"/>
-            </a:solidFill>
-            <a:round/>
-          </a:ln>
-          <a:effectLst>
-            <a:outerShdw blurRad="39960" dir="5400000" dist="23040" rotWithShape="0">
-              <a:srgbClr val="000000">
-                <a:alpha val="35000"/>
-              </a:srgbClr>
-            </a:outerShdw>
-          </a:effectLst>
-        </p:spPr>
-        <p:style>
-          <a:lnRef idx="1">
-            <a:schemeClr val="accent1"/>
-          </a:lnRef>
-          <a:fillRef idx="3">
-            <a:schemeClr val="accent1"/>
-          </a:fillRef>
-          <a:effectRef idx="2">
-            <a:schemeClr val="accent1"/>
-          </a:effectRef>
-          <a:fontRef idx="minor"/>
-        </p:style>
-        <p:txBody>
-          <a:bodyPr lIns="90000" rIns="90000" tIns="-21960" bIns="-21960" anchor="ctr">
-            <a:noAutofit/>
-          </a:bodyPr>
-          <a:p>
-            <a:pPr algn="ctr" defTabSz="457200">
-              <a:lnSpc>
-                <a:spcPct val="100000"/>
-              </a:lnSpc>
-            </a:pPr>
-            <a:endParaRPr b="0" lang="en-US" sz="1800" spc="-1" strike="noStrike">
-              <a:solidFill>
-                <a:schemeClr val="lt1"/>
-              </a:solidFill>
-              <a:latin typeface="Calibri"/>
-            </a:endParaRPr>
-          </a:p>
-        </p:txBody>
-      </p:sp>
-      <p:sp>
-        <p:nvSpPr>
-          <p:cNvPr id="151" name="TextBox 5"/>
-          <p:cNvSpPr/>
-          <p:nvPr/>
-        </p:nvSpPr>
-        <p:spPr>
-          <a:xfrm>
-            <a:off x="731520" y="1783080"/>
-            <a:ext cx="4845600" cy="736920"/>
-          </a:xfrm>
-          <a:prstGeom prst="rect">
-            <a:avLst/>
-          </a:prstGeom>
-          <a:noFill/>
-          <a:ln w="0">
-            <a:noFill/>
-          </a:ln>
-        </p:spPr>
-        <p:style>
-          <a:lnRef idx="0"/>
-          <a:fillRef idx="0"/>
-          <a:effectRef idx="0"/>
-          <a:fontRef idx="minor"/>
-        </p:style>
-        <p:txBody>
-          <a:bodyPr lIns="27360" rIns="27360" tIns="18360" bIns="18360" anchor="t">
-            <a:spAutoFit/>
-          </a:bodyPr>
-          <a:p>
-            <a:pPr defTabSz="457200">
-              <a:lnSpc>
-                <a:spcPct val="100000"/>
-              </a:lnSpc>
-            </a:pPr>
-            <a:r>
-              <a:rPr b="1" lang="en-US" sz="2300" spc="-1" strike="noStrike">
-                <a:solidFill>
-                  <a:srgbClr val="263143"/>
-                </a:solidFill>
-                <a:latin typeface="Aptos"/>
-              </a:rPr>
-              <a:t>A programmable transformation layer</a:t>
-            </a:r>
-            <a:endParaRPr b="0" lang="pt-BR" sz="2300" spc="-1" strike="noStrike">
-              <a:solidFill>
-                <a:srgbClr val="000000"/>
-              </a:solidFill>
-              <a:latin typeface="Arial"/>
-            </a:endParaRPr>
-          </a:p>
-        </p:txBody>
-      </p:sp>
-      <p:sp>
-        <p:nvSpPr>
-          <p:cNvPr id="152" name="TextBox 6"/>
-          <p:cNvSpPr/>
-          <p:nvPr/>
-        </p:nvSpPr>
-        <p:spPr>
-          <a:xfrm>
-            <a:off x="777240" y="2560320"/>
-            <a:ext cx="4662720" cy="2500200"/>
-          </a:xfrm>
-          <a:prstGeom prst="rect">
-            <a:avLst/>
-          </a:prstGeom>
-          <a:noFill/>
-          <a:ln w="0">
-            <a:noFill/>
-          </a:ln>
-        </p:spPr>
-        <p:style>
-          <a:lnRef idx="0"/>
-          <a:fillRef idx="0"/>
-          <a:effectRef idx="0"/>
-          <a:fontRef idx="minor"/>
-        </p:style>
-        <p:txBody>
-          <a:bodyPr lIns="45720" rIns="45720" tIns="27360" bIns="18360" anchor="t">
-            <a:spAutoFit/>
-          </a:bodyPr>
-          <a:p>
-            <a:pPr defTabSz="457200">
-              <a:lnSpc>
-                <a:spcPct val="100000"/>
-              </a:lnSpc>
-              <a:spcAft>
-                <a:spcPts val="1001"/>
-              </a:spcAft>
-            </a:pPr>
-            <a:r>
-              <a:rPr b="0" lang="en-US" sz="1700" spc="-1" strike="noStrike">
-                <a:solidFill>
-                  <a:srgbClr val="263143"/>
-                </a:solidFill>
-                <a:latin typeface="Aptos"/>
-              </a:rPr>
-              <a:t>Written in a language available in the environment</a:t>
-            </a:r>
-            <a:endParaRPr b="0" lang="pt-BR" sz="1700" spc="-1" strike="noStrike">
-              <a:solidFill>
-                <a:srgbClr val="000000"/>
-              </a:solidFill>
-              <a:latin typeface="Arial"/>
-            </a:endParaRPr>
-          </a:p>
-          <a:p>
-            <a:pPr defTabSz="457200">
-              <a:lnSpc>
-                <a:spcPct val="100000"/>
-              </a:lnSpc>
-              <a:spcAft>
-                <a:spcPts val="1001"/>
-              </a:spcAft>
-            </a:pPr>
-            <a:r>
-              <a:rPr b="0" lang="en-US" sz="1700" spc="-1" strike="noStrike">
-                <a:solidFill>
-                  <a:srgbClr val="263143"/>
-                </a:solidFill>
-                <a:latin typeface="Aptos"/>
-              </a:rPr>
-              <a:t>Receives and returns Hoverfly’s middleware JSON</a:t>
-            </a:r>
-            <a:endParaRPr b="0" lang="pt-BR" sz="1700" spc="-1" strike="noStrike">
-              <a:solidFill>
-                <a:srgbClr val="000000"/>
-              </a:solidFill>
-              <a:latin typeface="Arial"/>
-            </a:endParaRPr>
-          </a:p>
-          <a:p>
-            <a:pPr defTabSz="457200">
-              <a:lnSpc>
-                <a:spcPct val="100000"/>
-              </a:lnSpc>
-              <a:spcAft>
-                <a:spcPts val="1001"/>
-              </a:spcAft>
-            </a:pPr>
-            <a:r>
-              <a:rPr b="0" lang="en-US" sz="1700" spc="-1" strike="noStrike">
-                <a:solidFill>
-                  <a:srgbClr val="263143"/>
-                </a:solidFill>
-                <a:latin typeface="Aptos"/>
-              </a:rPr>
-              <a:t>Can alter payloads, status codes, headers or latency</a:t>
-            </a:r>
-            <a:endParaRPr b="0" lang="pt-BR" sz="1700" spc="-1" strike="noStrike">
-              <a:solidFill>
-                <a:srgbClr val="000000"/>
-              </a:solidFill>
-              <a:latin typeface="Arial"/>
-            </a:endParaRPr>
-          </a:p>
-          <a:p>
-            <a:pPr defTabSz="457200">
-              <a:lnSpc>
-                <a:spcPct val="100000"/>
-              </a:lnSpc>
-              <a:spcAft>
-                <a:spcPts val="1001"/>
-              </a:spcAft>
-            </a:pPr>
-            <a:r>
-              <a:rPr b="0" lang="en-US" sz="1700" spc="-1" strike="noStrike">
-                <a:solidFill>
-                  <a:srgbClr val="263143"/>
-                </a:solidFill>
-                <a:latin typeface="Aptos"/>
-              </a:rPr>
-              <a:t>In MODIFY mode, can affect requests and responses</a:t>
-            </a:r>
-            <a:endParaRPr b="0" lang="pt-BR" sz="1700" spc="-1" strike="noStrike">
-              <a:solidFill>
-                <a:srgbClr val="000000"/>
-              </a:solidFill>
-              <a:latin typeface="Arial"/>
-            </a:endParaRPr>
-          </a:p>
-        </p:txBody>
-      </p:sp>
-      <p:sp>
-        <p:nvSpPr>
-          <p:cNvPr id="153" name="Rounded Rectangle 7"/>
-          <p:cNvSpPr/>
-          <p:nvPr/>
-        </p:nvSpPr>
-        <p:spPr>
-          <a:xfrm>
-            <a:off x="5852160" y="1828800"/>
-            <a:ext cx="2102400" cy="1325160"/>
-          </a:xfrm>
-          <a:prstGeom prst="roundRect">
-            <a:avLst>
-              <a:gd name="adj" fmla="val 16667"/>
-            </a:avLst>
-          </a:prstGeom>
-          <a:solidFill>
-            <a:srgbClr val="ffffff"/>
-          </a:solidFill>
-          <a:ln>
-            <a:solidFill>
-              <a:srgbClr val="dae2ed"/>
-            </a:solidFill>
-            <a:round/>
-          </a:ln>
-          <a:effectLst>
-            <a:outerShdw blurRad="39960" dir="5400000" dist="23040" rotWithShape="0">
-              <a:srgbClr val="000000">
-                <a:alpha val="35000"/>
-              </a:srgbClr>
-            </a:outerShdw>
-          </a:effectLst>
-        </p:spPr>
-        <p:style>
-          <a:lnRef idx="1">
-            <a:schemeClr val="accent1"/>
-          </a:lnRef>
-          <a:fillRef idx="3">
-            <a:schemeClr val="accent1"/>
-          </a:fillRef>
-          <a:effectRef idx="2">
-            <a:schemeClr val="accent1"/>
-          </a:effectRef>
-          <a:fontRef idx="minor"/>
-        </p:style>
-        <p:txBody>
-          <a:bodyPr lIns="90000" rIns="90000" tIns="45000" bIns="45000" anchor="ctr">
-            <a:noAutofit/>
-          </a:bodyPr>
-          <a:p>
-            <a:pPr algn="ctr" defTabSz="457200">
-              <a:lnSpc>
-                <a:spcPct val="100000"/>
-              </a:lnSpc>
-            </a:pPr>
-            <a:endParaRPr b="0" lang="en-US" sz="1800" spc="-1" strike="noStrike">
-              <a:solidFill>
-                <a:schemeClr val="lt1"/>
-              </a:solidFill>
-              <a:latin typeface="Calibri"/>
-            </a:endParaRPr>
-          </a:p>
-        </p:txBody>
-      </p:sp>
-      <p:sp>
-        <p:nvSpPr>
-          <p:cNvPr id="154" name="TextBox 8"/>
-          <p:cNvSpPr/>
-          <p:nvPr/>
-        </p:nvSpPr>
-        <p:spPr>
-          <a:xfrm>
-            <a:off x="6053400" y="1993320"/>
-            <a:ext cx="1699920" cy="615240"/>
-          </a:xfrm>
-          <a:prstGeom prst="rect">
-            <a:avLst/>
-          </a:prstGeom>
-          <a:noFill/>
-          <a:ln w="0">
-            <a:noFill/>
-          </a:ln>
-        </p:spPr>
-        <p:style>
-          <a:lnRef idx="0"/>
-          <a:fillRef idx="0"/>
-          <a:effectRef idx="0"/>
-          <a:fontRef idx="minor"/>
-        </p:style>
-        <p:txBody>
-          <a:bodyPr lIns="27360" rIns="27360" tIns="18360" bIns="18360" anchor="t">
-            <a:spAutoFit/>
-          </a:bodyPr>
-          <a:p>
-            <a:pPr defTabSz="457200">
-              <a:lnSpc>
-                <a:spcPct val="100000"/>
-              </a:lnSpc>
-            </a:pPr>
-            <a:r>
-              <a:rPr b="1" lang="en-US" sz="1900" spc="-1" strike="noStrike">
-                <a:solidFill>
-                  <a:srgbClr val="be680f"/>
-                </a:solidFill>
-                <a:latin typeface="Aptos"/>
-              </a:rPr>
-              <a:t>Upstream API</a:t>
-            </a:r>
-            <a:endParaRPr b="0" lang="pt-BR" sz="1900" spc="-1" strike="noStrike">
-              <a:solidFill>
-                <a:srgbClr val="000000"/>
-              </a:solidFill>
-              <a:latin typeface="Arial"/>
-            </a:endParaRPr>
-          </a:p>
-        </p:txBody>
-      </p:sp>
-      <p:sp>
-        <p:nvSpPr>
-          <p:cNvPr id="155" name="TextBox 9"/>
-          <p:cNvSpPr/>
-          <p:nvPr/>
-        </p:nvSpPr>
-        <p:spPr>
-          <a:xfrm>
-            <a:off x="6053400" y="2487240"/>
-            <a:ext cx="1699920" cy="280080"/>
-          </a:xfrm>
-          <a:prstGeom prst="rect">
-            <a:avLst/>
-          </a:prstGeom>
-          <a:noFill/>
-          <a:ln w="0">
-            <a:noFill/>
-          </a:ln>
-        </p:spPr>
-        <p:style>
-          <a:lnRef idx="0"/>
-          <a:fillRef idx="0"/>
-          <a:effectRef idx="0"/>
-          <a:fontRef idx="minor"/>
-        </p:style>
-        <p:txBody>
-          <a:bodyPr lIns="27360" rIns="27360" tIns="18360" bIns="18360" anchor="t">
-            <a:spAutoFit/>
-          </a:bodyPr>
-          <a:p>
-            <a:pPr defTabSz="457200">
-              <a:lnSpc>
-                <a:spcPct val="100000"/>
-              </a:lnSpc>
-            </a:pPr>
-            <a:r>
-              <a:rPr b="0" lang="en-US" sz="1600" spc="-1" strike="noStrike">
-                <a:solidFill>
-                  <a:srgbClr val="263143"/>
-                </a:solidFill>
-                <a:latin typeface="Aptos"/>
-              </a:rPr>
-              <a:t>JSON response</a:t>
-            </a:r>
-            <a:endParaRPr b="0" lang="pt-BR" sz="1600" spc="-1" strike="noStrike">
-              <a:solidFill>
-                <a:srgbClr val="000000"/>
-              </a:solidFill>
-              <a:latin typeface="Arial"/>
-            </a:endParaRPr>
-          </a:p>
-        </p:txBody>
-      </p:sp>
-      <p:sp>
-        <p:nvSpPr>
-          <p:cNvPr id="156" name="Rounded Rectangle 10"/>
-          <p:cNvSpPr/>
-          <p:nvPr/>
-        </p:nvSpPr>
-        <p:spPr>
-          <a:xfrm>
-            <a:off x="8641080" y="1828800"/>
-            <a:ext cx="2468160" cy="1325160"/>
-          </a:xfrm>
-          <a:prstGeom prst="roundRect">
-            <a:avLst>
-              <a:gd name="adj" fmla="val 16667"/>
-            </a:avLst>
-          </a:prstGeom>
-          <a:solidFill>
-            <a:srgbClr val="ffffff"/>
-          </a:solidFill>
-          <a:ln>
-            <a:solidFill>
-              <a:srgbClr val="dae2ed"/>
-            </a:solidFill>
-            <a:round/>
-          </a:ln>
-          <a:effectLst>
-            <a:outerShdw blurRad="39960" dir="5400000" dist="23040" rotWithShape="0">
-              <a:srgbClr val="000000">
-                <a:alpha val="35000"/>
-              </a:srgbClr>
-            </a:outerShdw>
-          </a:effectLst>
-        </p:spPr>
-        <p:style>
-          <a:lnRef idx="1">
-            <a:schemeClr val="accent1"/>
-          </a:lnRef>
-          <a:fillRef idx="3">
-            <a:schemeClr val="accent1"/>
-          </a:fillRef>
-          <a:effectRef idx="2">
-            <a:schemeClr val="accent1"/>
-          </a:effectRef>
-          <a:fontRef idx="minor"/>
-        </p:style>
-        <p:txBody>
-          <a:bodyPr lIns="90000" rIns="90000" tIns="45000" bIns="45000" anchor="ctr">
-            <a:noAutofit/>
-          </a:bodyPr>
-          <a:p>
-            <a:pPr algn="ctr" defTabSz="457200">
-              <a:lnSpc>
-                <a:spcPct val="100000"/>
-              </a:lnSpc>
-            </a:pPr>
-            <a:endParaRPr b="0" lang="en-US" sz="1800" spc="-1" strike="noStrike">
-              <a:solidFill>
-                <a:schemeClr val="lt1"/>
-              </a:solidFill>
-              <a:latin typeface="Calibri"/>
-            </a:endParaRPr>
-          </a:p>
-        </p:txBody>
-      </p:sp>
-      <p:sp>
-        <p:nvSpPr>
-          <p:cNvPr id="157" name="TextBox 11"/>
-          <p:cNvSpPr/>
-          <p:nvPr/>
-        </p:nvSpPr>
-        <p:spPr>
-          <a:xfrm>
-            <a:off x="8842320" y="1993320"/>
-            <a:ext cx="2065680" cy="615240"/>
-          </a:xfrm>
-          <a:prstGeom prst="rect">
-            <a:avLst/>
-          </a:prstGeom>
-          <a:noFill/>
-          <a:ln w="0">
-            <a:noFill/>
-          </a:ln>
-        </p:spPr>
-        <p:style>
-          <a:lnRef idx="0"/>
-          <a:fillRef idx="0"/>
-          <a:effectRef idx="0"/>
-          <a:fontRef idx="minor"/>
-        </p:style>
-        <p:txBody>
-          <a:bodyPr lIns="27360" rIns="27360" tIns="18360" bIns="18360" anchor="t">
-            <a:spAutoFit/>
-          </a:bodyPr>
-          <a:p>
-            <a:pPr defTabSz="457200">
-              <a:lnSpc>
-                <a:spcPct val="100000"/>
-              </a:lnSpc>
-            </a:pPr>
-            <a:r>
-              <a:rPr b="1" lang="en-US" sz="1900" spc="-1" strike="noStrike">
-                <a:solidFill>
-                  <a:srgbClr val="008996"/>
-                </a:solidFill>
-                <a:latin typeface="Aptos"/>
-              </a:rPr>
-              <a:t>Python middleware</a:t>
-            </a:r>
-            <a:endParaRPr b="0" lang="pt-BR" sz="1900" spc="-1" strike="noStrike">
-              <a:solidFill>
-                <a:srgbClr val="000000"/>
-              </a:solidFill>
-              <a:latin typeface="Arial"/>
-            </a:endParaRPr>
-          </a:p>
-        </p:txBody>
-      </p:sp>
-      <p:sp>
-        <p:nvSpPr>
-          <p:cNvPr id="158" name="TextBox 12"/>
-          <p:cNvSpPr/>
-          <p:nvPr/>
-        </p:nvSpPr>
-        <p:spPr>
-          <a:xfrm>
-            <a:off x="8842320" y="2487240"/>
-            <a:ext cx="2065680" cy="493560"/>
-          </a:xfrm>
-          <a:prstGeom prst="rect">
-            <a:avLst/>
-          </a:prstGeom>
-          <a:noFill/>
-          <a:ln w="0">
-            <a:noFill/>
-          </a:ln>
-        </p:spPr>
-        <p:style>
-          <a:lnRef idx="0"/>
-          <a:fillRef idx="0"/>
-          <a:effectRef idx="0"/>
-          <a:fontRef idx="minor"/>
-        </p:style>
-        <p:txBody>
-          <a:bodyPr lIns="27360" rIns="27360" tIns="18360" bIns="18360" anchor="t">
-            <a:spAutoFit/>
-          </a:bodyPr>
-          <a:p>
-            <a:pPr defTabSz="457200">
-              <a:lnSpc>
-                <a:spcPct val="100000"/>
-              </a:lnSpc>
-            </a:pPr>
-            <a:r>
-              <a:rPr b="0" lang="en-US" sz="1500" spc="-1" strike="noStrike">
-                <a:solidFill>
-                  <a:srgbClr val="263143"/>
-                </a:solidFill>
-                <a:latin typeface="Aptos"/>
-              </a:rPr>
-              <a:t>Decode → change → encode</a:t>
-            </a:r>
-            <a:endParaRPr b="0" lang="pt-BR" sz="1500" spc="-1" strike="noStrike">
-              <a:solidFill>
-                <a:srgbClr val="000000"/>
-              </a:solidFill>
-              <a:latin typeface="Arial"/>
-            </a:endParaRPr>
-          </a:p>
-        </p:txBody>
-      </p:sp>
-      <p:cxnSp>
-        <p:nvCxnSpPr>
-          <p:cNvPr id="159" name="Connector 13"/>
-          <p:cNvCxnSpPr/>
-          <p:nvPr/>
-        </p:nvCxnSpPr>
-        <p:spPr>
-          <a:xfrm>
-            <a:off x="7954920" y="2486880"/>
-            <a:ext cx="686880" cy="720"/>
-          </a:xfrm>
-          <a:prstGeom prst="straightConnector1">
-            <a:avLst/>
-          </a:prstGeom>
-          <a:ln w="31750">
-            <a:solidFill>
-              <a:srgbClr val="6f4cbe"/>
-            </a:solidFill>
-            <a:round/>
-          </a:ln>
-        </p:spPr>
-      </p:cxnSp>
-      <p:sp>
-        <p:nvSpPr>
-          <p:cNvPr id="160" name="TextBox 14"/>
-          <p:cNvSpPr/>
-          <p:nvPr/>
-        </p:nvSpPr>
-        <p:spPr>
-          <a:xfrm>
-            <a:off x="5897880" y="3657600"/>
-            <a:ext cx="5211360" cy="295560"/>
-          </a:xfrm>
-          <a:prstGeom prst="rect">
-            <a:avLst/>
-          </a:prstGeom>
-          <a:noFill/>
-          <a:ln w="0">
-            <a:noFill/>
-          </a:ln>
-        </p:spPr>
-        <p:style>
-          <a:lnRef idx="0"/>
-          <a:fillRef idx="0"/>
-          <a:effectRef idx="0"/>
-          <a:fontRef idx="minor"/>
-        </p:style>
-        <p:txBody>
-          <a:bodyPr lIns="27360" rIns="27360" tIns="18360" bIns="18360" anchor="t">
-            <a:spAutoFit/>
-          </a:bodyPr>
-          <a:p>
-            <a:pPr defTabSz="457200">
-              <a:lnSpc>
-                <a:spcPct val="100000"/>
-              </a:lnSpc>
-            </a:pPr>
-            <a:r>
-              <a:rPr b="1" lang="en-US" sz="1700" spc="-1" strike="noStrike">
-                <a:solidFill>
-                  <a:srgbClr val="6f4cbe"/>
-                </a:solidFill>
-                <a:latin typeface="Aptos"/>
-              </a:rPr>
-              <a:t>Implementation detail from this POC</a:t>
-            </a:r>
-            <a:endParaRPr b="0" lang="pt-BR" sz="1700" spc="-1" strike="noStrike">
-              <a:solidFill>
-                <a:srgbClr val="000000"/>
-              </a:solidFill>
-              <a:latin typeface="Arial"/>
-            </a:endParaRPr>
-          </a:p>
-        </p:txBody>
-      </p:sp>
-      <p:sp>
-        <p:nvSpPr>
-          <p:cNvPr id="161" name="TextBox 15"/>
-          <p:cNvSpPr/>
-          <p:nvPr/>
-        </p:nvSpPr>
-        <p:spPr>
-          <a:xfrm>
-            <a:off x="5897880" y="4114800"/>
-            <a:ext cx="5302800" cy="950760"/>
-          </a:xfrm>
-          <a:prstGeom prst="rect">
-            <a:avLst/>
-          </a:prstGeom>
-          <a:noFill/>
-          <a:ln w="0">
-            <a:noFill/>
-          </a:ln>
-        </p:spPr>
-        <p:style>
-          <a:lnRef idx="0"/>
-          <a:fillRef idx="0"/>
-          <a:effectRef idx="0"/>
-          <a:fontRef idx="minor"/>
-        </p:style>
-        <p:txBody>
-          <a:bodyPr lIns="27360" rIns="27360" tIns="18360" bIns="18360" anchor="t">
-            <a:spAutoFit/>
-          </a:bodyPr>
-          <a:p>
-            <a:pPr defTabSz="457200">
-              <a:lnSpc>
-                <a:spcPct val="100000"/>
-              </a:lnSpc>
-            </a:pPr>
-            <a:r>
-              <a:rPr b="0" lang="en-US" sz="1500" spc="-1" strike="noStrike">
-                <a:solidFill>
-                  <a:srgbClr val="263143"/>
-                </a:solidFill>
-                <a:latin typeface="Aptos"/>
-              </a:rPr>
-              <a:t>The external response arrived gzip-compressed and Base64-encoded. Middleware must handle that representation before editing JSON; requesting identity encoding can simplify the path.</a:t>
-            </a:r>
-            <a:endParaRPr b="0" lang="pt-BR" sz="1500" spc="-1" strike="noStrike">
-              <a:solidFill>
-                <a:srgbClr val="000000"/>
-              </a:solidFill>
-              <a:latin typeface="Arial"/>
-            </a:endParaRPr>
-          </a:p>
-        </p:txBody>
-      </p:sp>
-      <p:sp>
-        <p:nvSpPr>
-          <p:cNvPr id="162" name="TextBox 16"/>
-          <p:cNvSpPr/>
-          <p:nvPr/>
-        </p:nvSpPr>
-        <p:spPr>
-          <a:xfrm>
-            <a:off x="594360" y="6528960"/>
-            <a:ext cx="7314480" cy="173880"/>
-          </a:xfrm>
-          <a:prstGeom prst="rect">
-            <a:avLst/>
-          </a:prstGeom>
-          <a:noFill/>
-          <a:ln w="0">
-            <a:noFill/>
-          </a:ln>
-        </p:spPr>
-        <p:style>
-          <a:lnRef idx="0"/>
-          <a:fillRef idx="0"/>
-          <a:effectRef idx="0"/>
-          <a:fontRef idx="minor"/>
-        </p:style>
-        <p:txBody>
-          <a:bodyPr lIns="27360" rIns="27360" tIns="18360" bIns="18360" anchor="t">
-            <a:spAutoFit/>
-          </a:bodyPr>
-          <a:p>
-            <a:pPr defTabSz="457200">
-              <a:lnSpc>
-                <a:spcPct val="100000"/>
-              </a:lnSpc>
-            </a:pPr>
-            <a:r>
-              <a:rPr b="0" lang="en-US" sz="900" spc="-1" strike="noStrike">
-                <a:solidFill>
-                  <a:srgbClr val="5e6c81"/>
-                </a:solidFill>
-                <a:latin typeface="Aptos"/>
-              </a:rPr>
-              <a:t>HOVERFLY  /  API SIMULATION FOR TESTING</a:t>
-            </a:r>
-            <a:endParaRPr b="0" lang="pt-BR" sz="900" spc="-1" strike="noStrike">
-              <a:solidFill>
-                <a:srgbClr val="000000"/>
-              </a:solidFill>
-              <a:latin typeface="Arial"/>
-            </a:endParaRPr>
-          </a:p>
-        </p:txBody>
-      </p:sp>
-      <p:sp>
-        <p:nvSpPr>
-          <p:cNvPr id="163" name="TextBox 17"/>
-          <p:cNvSpPr/>
-          <p:nvPr/>
-        </p:nvSpPr>
-        <p:spPr>
-          <a:xfrm>
-            <a:off x="10972800" y="6492240"/>
-            <a:ext cx="547920" cy="189000"/>
-          </a:xfrm>
-          <a:prstGeom prst="rect">
-            <a:avLst/>
-          </a:prstGeom>
-          <a:noFill/>
-          <a:ln w="0">
-            <a:noFill/>
-          </a:ln>
-        </p:spPr>
-        <p:style>
-          <a:lnRef idx="0"/>
-          <a:fillRef idx="0"/>
-          <a:effectRef idx="0"/>
-          <a:fontRef idx="minor"/>
-        </p:style>
-        <p:txBody>
-          <a:bodyPr lIns="27360" rIns="27360" tIns="18360" bIns="18360" anchor="t">
-            <a:spAutoFit/>
-          </a:bodyPr>
-          <a:p>
-            <a:pPr algn="r" defTabSz="457200">
-              <a:lnSpc>
-                <a:spcPct val="100000"/>
-              </a:lnSpc>
-            </a:pPr>
-            <a:r>
-              <a:rPr b="1" lang="en-US" sz="1000" spc="-1" strike="noStrike">
-                <a:solidFill>
-                  <a:srgbClr val="5e6c81"/>
-                </a:solidFill>
-                <a:latin typeface="Aptos"/>
-              </a:rPr>
-              <a:t>06</a:t>
-            </a:r>
-            <a:endParaRPr b="0" lang="pt-BR" sz="1000" spc="-1" strike="noStrike">
-              <a:solidFill>
-                <a:srgbClr val="000000"/>
-              </a:solidFill>
-              <a:latin typeface="Arial"/>
-            </a:endParaRPr>
-          </a:p>
-        </p:txBody>
-      </p:sp>
-    </p:spTree>
-  </p:cSld>
-  <mc:AlternateContent>
-    <mc:Choice Requires="p14">
-      <p:transition spd="slow" p14:dur="2000"/>
-    </mc:Choice>
-    <mc:Fallback>
-      <p:transition spd="slow"/>
-    </mc:Fallback>
-  </mc:AlternateContent>
-</p:sld>
-</file>
-
-<file path=ppt/slides/slide9.xml><?xml version="1.0" encoding="utf-8"?>
 <p:sld xmlns:a="http://schemas.openxmlformats.org/drawingml/2006/main" xmlns:p="http://schemas.openxmlformats.org/presentationml/2006/main" xmlns:r="http://schemas.openxmlformats.org/officeDocument/2006/relationships" xmlns:p14="http://schemas.microsoft.com/office/powerpoint/2010/main" xmlns:p15="http://schemas.microsoft.com/office/powerpoint/2012/main" xmlns:mc="http://schemas.openxmlformats.org/markup-compatibility/2006">
   <p:cSld>
     <p:bg>
@@ -11705,7 +9513,7 @@
       </p:grpSpPr>
       <p:sp>
         <p:nvSpPr>
-          <p:cNvPr id="164" name="TextBox 2"/>
+          <p:cNvPr id="129" name="TextBox 2"/>
           <p:cNvSpPr/>
           <p:nvPr/>
         </p:nvSpPr>
@@ -11745,7 +9553,7 @@
                 </a:solidFill>
                 <a:latin typeface="Aptos"/>
               </a:rPr>
-              <a:t>Where Hoverfly fits — and what to watch</a:t>
+              <a:t>Where Hoverfly fits</a:t>
             </a:r>
             <a:endParaRPr b="0" lang="pt-BR" sz="3000" spc="-1" strike="noStrike">
               <a:solidFill>
@@ -11758,7 +9566,7 @@
       </p:sp>
       <p:sp>
         <p:nvSpPr>
-          <p:cNvPr id="165" name="Rectangle 4"/>
+          <p:cNvPr id="130" name="Rectangle 4"/>
           <p:cNvSpPr/>
           <p:nvPr/>
         </p:nvSpPr>
@@ -11820,7 +9628,7 @@
       </p:sp>
       <p:sp>
         <p:nvSpPr>
-          <p:cNvPr id="166" name="Rounded Rectangle 5"/>
+          <p:cNvPr id="131" name="Rounded Rectangle 5"/>
           <p:cNvSpPr/>
           <p:nvPr/>
         </p:nvSpPr>
@@ -11884,7 +9692,7 @@
       </p:sp>
       <p:sp>
         <p:nvSpPr>
-          <p:cNvPr id="167" name="TextBox 6"/>
+          <p:cNvPr id="132" name="TextBox 6"/>
           <p:cNvSpPr/>
           <p:nvPr/>
         </p:nvSpPr>
@@ -11937,7 +9745,7 @@
       </p:sp>
       <p:sp>
         <p:nvSpPr>
-          <p:cNvPr id="168" name="TextBox 7"/>
+          <p:cNvPr id="133" name="TextBox 7"/>
           <p:cNvSpPr/>
           <p:nvPr/>
         </p:nvSpPr>
@@ -11976,8 +9784,18 @@
                   <a:srgbClr val="263143"/>
                 </a:solidFill>
                 <a:latin typeface="Aptos"/>
-              </a:rPr>
-              <a:t>Integration tests with HTTP dependencies; repeatable regression cases; controlled failures and response variants.</a:t>
+                <a:ea typeface="Noto Sans CJK SC"/>
+              </a:rPr>
+              <a:t>Integration or end-to-end </a:t>
+            </a:r>
+            <a:r>
+              <a:rPr b="0" lang="en-US" sz="1700" spc="-1" strike="noStrike">
+                <a:solidFill>
+                  <a:srgbClr val="263143"/>
+                </a:solidFill>
+                <a:latin typeface="Aptos"/>
+              </a:rPr>
+              <a:t>tests with HTTP dependencies; repeatable regression cases; controlled failures and response variants.</a:t>
             </a:r>
             <a:endParaRPr b="0" lang="pt-BR" sz="1700" spc="-1" strike="noStrike">
               <a:solidFill>
@@ -11990,7 +9808,7 @@
       </p:sp>
       <p:sp>
         <p:nvSpPr>
-          <p:cNvPr id="169" name="Rounded Rectangle 8"/>
+          <p:cNvPr id="134" name="Rounded Rectangle 8"/>
           <p:cNvSpPr/>
           <p:nvPr/>
         </p:nvSpPr>
@@ -12054,7 +9872,7 @@
       </p:sp>
       <p:sp>
         <p:nvSpPr>
-          <p:cNvPr id="170" name="TextBox 9"/>
+          <p:cNvPr id="135" name="TextBox 9"/>
           <p:cNvSpPr/>
           <p:nvPr/>
         </p:nvSpPr>
@@ -12107,7 +9925,7 @@
       </p:sp>
       <p:sp>
         <p:nvSpPr>
-          <p:cNvPr id="171" name="TextBox 10"/>
+          <p:cNvPr id="136" name="TextBox 10"/>
           <p:cNvSpPr/>
           <p:nvPr/>
         </p:nvSpPr>
@@ -12147,7 +9965,7 @@
                 </a:solidFill>
                 <a:latin typeface="Aptos"/>
               </a:rPr>
-              <a:t>All end-to-end tests, contract test, or unit test where a local mock is sufficient.</a:t>
+              <a:t>All end-to-end tests use cases, contract test, or unit test where a local mock is sufficient.</a:t>
             </a:r>
             <a:endParaRPr b="0" lang="pt-BR" sz="1700" spc="-1" strike="noStrike">
               <a:solidFill>
@@ -12160,7 +9978,7 @@
       </p:sp>
       <p:sp>
         <p:nvSpPr>
-          <p:cNvPr id="172" name="TextBox 13"/>
+          <p:cNvPr id="137" name="TextBox 13"/>
           <p:cNvSpPr/>
           <p:nvPr/>
         </p:nvSpPr>
@@ -12213,7 +10031,7 @@
       </p:sp>
       <p:sp>
         <p:nvSpPr>
-          <p:cNvPr id="173" name="TextBox 14"/>
+          <p:cNvPr id="138" name="TextBox 14"/>
           <p:cNvSpPr/>
           <p:nvPr/>
         </p:nvSpPr>
